--- a/chapter1/clips/clip-05-exploring-a-dataset/clip.pptx
+++ b/chapter1/clips/clip-05-exploring-a-dataset/clip.pptx
@@ -11,8 +11,7 @@
     <p:sldId id="259" r:id="rId10"/>
     <p:sldId id="260" r:id="rId11"/>
     <p:sldId id="261" r:id="rId12"/>
-    <p:sldId id="262" r:id="rId13"/>
-    <p:sldId id="263" r:id="rId14"/>
+    <p:sldId id="262" r:id="rId14"/>
   </p:sldIdLst>
   <p:sldSz cx="12191695" cy="6858000" type="screen4x3"/>
   <p:notesSz cx="6858000" cy="9144000"/>
@@ -112,6 +111,436 @@
     </a:lvl9pPr>
   </p:defaultTextStyle>
 </p:presentation>
+</file>
+
+<file path=ppt/notesMasters/notesMaster1.xml><?xml version="1.0" encoding="utf-8"?>
+<p:notesMaster xmlns:a="http://schemas.openxmlformats.org/drawingml/2006/main" xmlns:p="http://schemas.openxmlformats.org/presentationml/2006/main" xmlns:r="http://schemas.openxmlformats.org/officeDocument/2006/relationships">
+  <p:cSld>
+    <p:bg>
+      <p:bgRef idx="1001">
+        <a:schemeClr val="bg1"/>
+      </p:bgRef>
+    </p:bg>
+    <p:spTree>
+      <p:nvGrpSpPr>
+        <p:cNvPr id="1" name=""/>
+        <p:cNvGrpSpPr/>
+        <p:nvPr/>
+      </p:nvGrpSpPr>
+      <p:grpSpPr>
+        <a:xfrm>
+          <a:off x="0" y="0"/>
+          <a:ext cx="0" cy="0"/>
+          <a:chOff x="0" y="0"/>
+          <a:chExt cx="0" cy="0"/>
+        </a:xfrm>
+      </p:grpSpPr>
+      <p:sp>
+        <p:nvSpPr>
+          <p:cNvPr id="2" name="Header Placeholder 1"/>
+          <p:cNvSpPr>
+            <a:spLocks noGrp="1"/>
+          </p:cNvSpPr>
+          <p:nvPr>
+            <p:ph type="hdr" sz="quarter"/>
+          </p:nvPr>
+        </p:nvSpPr>
+        <p:spPr>
+          <a:xfrm>
+            <a:off x="0" y="0"/>
+            <a:ext cx="2971800" cy="457200"/>
+          </a:xfrm>
+          <a:prstGeom prst="rect">
+            <a:avLst/>
+          </a:prstGeom>
+        </p:spPr>
+        <p:txBody>
+          <a:bodyPr vert="horz" lIns="91440" tIns="45720" rIns="91440" bIns="45720" rtlCol="0"/>
+          <a:lstStyle>
+            <a:lvl1pPr algn="l">
+              <a:defRPr sz="1200"/>
+            </a:lvl1pPr>
+          </a:lstStyle>
+          <a:p>
+            <a:endParaRPr lang="en-US"/>
+          </a:p>
+        </p:txBody>
+      </p:sp>
+      <p:sp>
+        <p:nvSpPr>
+          <p:cNvPr id="3" name="Date Placeholder 2"/>
+          <p:cNvSpPr>
+            <a:spLocks noGrp="1"/>
+          </p:cNvSpPr>
+          <p:nvPr>
+            <p:ph type="dt" idx="1"/>
+          </p:nvPr>
+        </p:nvSpPr>
+        <p:spPr>
+          <a:xfrm>
+            <a:off x="3884613" y="0"/>
+            <a:ext cx="2971800" cy="457200"/>
+          </a:xfrm>
+          <a:prstGeom prst="rect">
+            <a:avLst/>
+          </a:prstGeom>
+        </p:spPr>
+        <p:txBody>
+          <a:bodyPr vert="horz" lIns="91440" tIns="45720" rIns="91440" bIns="45720" rtlCol="0"/>
+          <a:lstStyle>
+            <a:lvl1pPr algn="r">
+              <a:defRPr sz="1200"/>
+            </a:lvl1pPr>
+          </a:lstStyle>
+          <a:p>
+            <a:fld id="{0F89C1C7-3DCD-1040-A9CF-14679D8B5DDD}" type="datetimeFigureOut">
+              <a:rPr lang="en-US" smtClean="0"/>
+              <a:t>10/17/16</a:t>
+            </a:fld>
+            <a:endParaRPr lang="en-US"/>
+          </a:p>
+        </p:txBody>
+      </p:sp>
+      <p:sp>
+        <p:nvSpPr>
+          <p:cNvPr id="4" name="Slide Image Placeholder 3"/>
+          <p:cNvSpPr>
+            <a:spLocks noGrp="1" noRot="1" noChangeAspect="1"/>
+          </p:cNvSpPr>
+          <p:nvPr>
+            <p:ph type="sldImg" idx="2"/>
+          </p:nvPr>
+        </p:nvSpPr>
+        <p:spPr>
+          <a:xfrm>
+            <a:off x="1143000" y="685800"/>
+            <a:ext cx="4572000" cy="3429000"/>
+          </a:xfrm>
+          <a:prstGeom prst="rect">
+            <a:avLst/>
+          </a:prstGeom>
+          <a:noFill/>
+          <a:ln w="12700">
+            <a:solidFill>
+              <a:prstClr val="black"/>
+            </a:solidFill>
+          </a:ln>
+        </p:spPr>
+        <p:txBody>
+          <a:bodyPr vert="horz" lIns="91440" tIns="45720" rIns="91440" bIns="45720" rtlCol="0" anchor="ctr"/>
+          <a:lstStyle/>
+          <a:p>
+            <a:endParaRPr lang="en-US"/>
+          </a:p>
+        </p:txBody>
+      </p:sp>
+      <p:sp>
+        <p:nvSpPr>
+          <p:cNvPr id="5" name="Notes Placeholder 4"/>
+          <p:cNvSpPr>
+            <a:spLocks noGrp="1"/>
+          </p:cNvSpPr>
+          <p:nvPr>
+            <p:ph type="body" sz="quarter" idx="3"/>
+          </p:nvPr>
+        </p:nvSpPr>
+        <p:spPr>
+          <a:xfrm>
+            <a:off x="685800" y="4343400"/>
+            <a:ext cx="5486400" cy="4114800"/>
+          </a:xfrm>
+          <a:prstGeom prst="rect">
+            <a:avLst/>
+          </a:prstGeom>
+        </p:spPr>
+        <p:txBody>
+          <a:bodyPr vert="horz" lIns="91440" tIns="45720" rIns="91440" bIns="45720" rtlCol="0"/>
+          <a:lstStyle/>
+          <a:p>
+            <a:pPr lvl="0"/>
+            <a:r>
+              <a:rPr lang="en-US" smtClean="0"/>
+              <a:t>Click to edit Master text styles</a:t>
+            </a:r>
+          </a:p>
+          <a:p>
+            <a:pPr lvl="1"/>
+            <a:r>
+              <a:rPr lang="en-US" smtClean="0"/>
+              <a:t>Second level</a:t>
+            </a:r>
+          </a:p>
+          <a:p>
+            <a:pPr lvl="2"/>
+            <a:r>
+              <a:rPr lang="en-US" smtClean="0"/>
+              <a:t>Third level</a:t>
+            </a:r>
+          </a:p>
+          <a:p>
+            <a:pPr lvl="3"/>
+            <a:r>
+              <a:rPr lang="en-US" smtClean="0"/>
+              <a:t>Fourth level</a:t>
+            </a:r>
+          </a:p>
+          <a:p>
+            <a:pPr lvl="4"/>
+            <a:r>
+              <a:rPr lang="en-US" smtClean="0"/>
+              <a:t>Fifth level</a:t>
+            </a:r>
+            <a:endParaRPr lang="en-US"/>
+          </a:p>
+        </p:txBody>
+      </p:sp>
+      <p:sp>
+        <p:nvSpPr>
+          <p:cNvPr id="6" name="Footer Placeholder 5"/>
+          <p:cNvSpPr>
+            <a:spLocks noGrp="1"/>
+          </p:cNvSpPr>
+          <p:nvPr>
+            <p:ph type="ftr" sz="quarter" idx="4"/>
+          </p:nvPr>
+        </p:nvSpPr>
+        <p:spPr>
+          <a:xfrm>
+            <a:off x="0" y="8685213"/>
+            <a:ext cx="2971800" cy="457200"/>
+          </a:xfrm>
+          <a:prstGeom prst="rect">
+            <a:avLst/>
+          </a:prstGeom>
+        </p:spPr>
+        <p:txBody>
+          <a:bodyPr vert="horz" lIns="91440" tIns="45720" rIns="91440" bIns="45720" rtlCol="0" anchor="b"/>
+          <a:lstStyle>
+            <a:lvl1pPr algn="l">
+              <a:defRPr sz="1200"/>
+            </a:lvl1pPr>
+          </a:lstStyle>
+          <a:p>
+            <a:endParaRPr lang="en-US"/>
+          </a:p>
+        </p:txBody>
+      </p:sp>
+      <p:sp>
+        <p:nvSpPr>
+          <p:cNvPr id="7" name="Slide Number Placeholder 6"/>
+          <p:cNvSpPr>
+            <a:spLocks noGrp="1"/>
+          </p:cNvSpPr>
+          <p:nvPr>
+            <p:ph type="sldNum" sz="quarter" idx="5"/>
+          </p:nvPr>
+        </p:nvSpPr>
+        <p:spPr>
+          <a:xfrm>
+            <a:off x="3884613" y="8685213"/>
+            <a:ext cx="2971800" cy="457200"/>
+          </a:xfrm>
+          <a:prstGeom prst="rect">
+            <a:avLst/>
+          </a:prstGeom>
+        </p:spPr>
+        <p:txBody>
+          <a:bodyPr vert="horz" lIns="91440" tIns="45720" rIns="91440" bIns="45720" rtlCol="0" anchor="b"/>
+          <a:lstStyle>
+            <a:lvl1pPr algn="r">
+              <a:defRPr sz="1200"/>
+            </a:lvl1pPr>
+          </a:lstStyle>
+          <a:p>
+            <a:fld id="{BB5E49A5-4136-284D-997B-48E1D791AD67}" type="slidenum">
+              <a:rPr lang="en-US" smtClean="0"/>
+              <a:t>‹#›</a:t>
+            </a:fld>
+            <a:endParaRPr lang="en-US"/>
+          </a:p>
+        </p:txBody>
+      </p:sp>
+    </p:spTree>
+    <p:extLst>
+      <p:ext uri="{BB962C8B-B14F-4D97-AF65-F5344CB8AC3E}">
+        <p14:creationId xmlns:p14="http://schemas.microsoft.com/office/powerpoint/2010/main" val="2623252185"/>
+      </p:ext>
+    </p:extLst>
+  </p:cSld>
+  <p:clrMap bg1="lt1" tx1="dk1" bg2="lt2" tx2="dk2" accent1="accent1" accent2="accent2" accent3="accent3" accent4="accent4" accent5="accent5" accent6="accent6" hlink="hlink" folHlink="folHlink"/>
+  <p:notesStyle>
+    <a:lvl1pPr marL="0" algn="l" defTabSz="457200" rtl="0" eaLnBrk="1" latinLnBrk="0" hangingPunct="1">
+      <a:defRPr sz="1200" kern="1200">
+        <a:solidFill>
+          <a:schemeClr val="tx1"/>
+        </a:solidFill>
+        <a:latin typeface="+mn-lt"/>
+        <a:ea typeface="+mn-ea"/>
+        <a:cs typeface="+mn-cs"/>
+      </a:defRPr>
+    </a:lvl1pPr>
+    <a:lvl2pPr marL="457200" algn="l" defTabSz="457200" rtl="0" eaLnBrk="1" latinLnBrk="0" hangingPunct="1">
+      <a:defRPr sz="1200" kern="1200">
+        <a:solidFill>
+          <a:schemeClr val="tx1"/>
+        </a:solidFill>
+        <a:latin typeface="+mn-lt"/>
+        <a:ea typeface="+mn-ea"/>
+        <a:cs typeface="+mn-cs"/>
+      </a:defRPr>
+    </a:lvl2pPr>
+    <a:lvl3pPr marL="914400" algn="l" defTabSz="457200" rtl="0" eaLnBrk="1" latinLnBrk="0" hangingPunct="1">
+      <a:defRPr sz="1200" kern="1200">
+        <a:solidFill>
+          <a:schemeClr val="tx1"/>
+        </a:solidFill>
+        <a:latin typeface="+mn-lt"/>
+        <a:ea typeface="+mn-ea"/>
+        <a:cs typeface="+mn-cs"/>
+      </a:defRPr>
+    </a:lvl3pPr>
+    <a:lvl4pPr marL="1371600" algn="l" defTabSz="457200" rtl="0" eaLnBrk="1" latinLnBrk="0" hangingPunct="1">
+      <a:defRPr sz="1200" kern="1200">
+        <a:solidFill>
+          <a:schemeClr val="tx1"/>
+        </a:solidFill>
+        <a:latin typeface="+mn-lt"/>
+        <a:ea typeface="+mn-ea"/>
+        <a:cs typeface="+mn-cs"/>
+      </a:defRPr>
+    </a:lvl4pPr>
+    <a:lvl5pPr marL="1828800" algn="l" defTabSz="457200" rtl="0" eaLnBrk="1" latinLnBrk="0" hangingPunct="1">
+      <a:defRPr sz="1200" kern="1200">
+        <a:solidFill>
+          <a:schemeClr val="tx1"/>
+        </a:solidFill>
+        <a:latin typeface="+mn-lt"/>
+        <a:ea typeface="+mn-ea"/>
+        <a:cs typeface="+mn-cs"/>
+      </a:defRPr>
+    </a:lvl5pPr>
+    <a:lvl6pPr marL="2286000" algn="l" defTabSz="457200" rtl="0" eaLnBrk="1" latinLnBrk="0" hangingPunct="1">
+      <a:defRPr sz="1200" kern="1200">
+        <a:solidFill>
+          <a:schemeClr val="tx1"/>
+        </a:solidFill>
+        <a:latin typeface="+mn-lt"/>
+        <a:ea typeface="+mn-ea"/>
+        <a:cs typeface="+mn-cs"/>
+      </a:defRPr>
+    </a:lvl6pPr>
+    <a:lvl7pPr marL="2743200" algn="l" defTabSz="457200" rtl="0" eaLnBrk="1" latinLnBrk="0" hangingPunct="1">
+      <a:defRPr sz="1200" kern="1200">
+        <a:solidFill>
+          <a:schemeClr val="tx1"/>
+        </a:solidFill>
+        <a:latin typeface="+mn-lt"/>
+        <a:ea typeface="+mn-ea"/>
+        <a:cs typeface="+mn-cs"/>
+      </a:defRPr>
+    </a:lvl7pPr>
+    <a:lvl8pPr marL="3200400" algn="l" defTabSz="457200" rtl="0" eaLnBrk="1" latinLnBrk="0" hangingPunct="1">
+      <a:defRPr sz="1200" kern="1200">
+        <a:solidFill>
+          <a:schemeClr val="tx1"/>
+        </a:solidFill>
+        <a:latin typeface="+mn-lt"/>
+        <a:ea typeface="+mn-ea"/>
+        <a:cs typeface="+mn-cs"/>
+      </a:defRPr>
+    </a:lvl8pPr>
+    <a:lvl9pPr marL="3657600" algn="l" defTabSz="457200" rtl="0" eaLnBrk="1" latinLnBrk="0" hangingPunct="1">
+      <a:defRPr sz="1200" kern="1200">
+        <a:solidFill>
+          <a:schemeClr val="tx1"/>
+        </a:solidFill>
+        <a:latin typeface="+mn-lt"/>
+        <a:ea typeface="+mn-ea"/>
+        <a:cs typeface="+mn-cs"/>
+      </a:defRPr>
+    </a:lvl9pPr>
+  </p:notesStyle>
+</p:notesMaster>
+</file>
+
+<file path=ppt/notesSlides/notesSlide1.xml><?xml version="1.0" encoding="utf-8"?>
+<p:notes xmlns:a="http://schemas.openxmlformats.org/drawingml/2006/main" xmlns:p="http://schemas.openxmlformats.org/presentationml/2006/main" xmlns:r="http://schemas.openxmlformats.org/officeDocument/2006/relationships">
+  <p:cSld>
+    <p:spTree>
+      <p:nvGrpSpPr>
+        <p:cNvPr id="1" name=""/>
+        <p:cNvGrpSpPr/>
+        <p:nvPr/>
+      </p:nvGrpSpPr>
+      <p:grpSpPr>
+        <a:xfrm>
+          <a:off x="0" y="0"/>
+          <a:ext cx="0" cy="0"/>
+          <a:chOff x="0" y="0"/>
+          <a:chExt cx="0" cy="0"/>
+        </a:xfrm>
+      </p:grpSpPr>
+      <p:sp>
+        <p:nvSpPr>
+          <p:cNvPr id="2" name="Slide Image Placeholder 1"/>
+          <p:cNvSpPr>
+            <a:spLocks noGrp="1"/>
+          </p:cNvSpPr>
+          <p:nvPr>
+            <p:ph type="sldImg" idx="2"/>
+          </p:nvPr>
+        </p:nvSpPr>
+        <p:spPr/>
+      </p:sp>
+      <p:sp>
+        <p:nvSpPr>
+          <p:cNvPr id="3" name="Notes Placeholder 2"/>
+          <p:cNvSpPr>
+            <a:spLocks noGrp="1"/>
+          </p:cNvSpPr>
+          <p:nvPr>
+            <p:ph type="body" idx="3" sz="quarter"/>
+          </p:nvPr>
+        </p:nvSpPr>
+        <p:spPr/>
+        <p:txBody>
+          <a:bodyPr/>
+          <a:lstStyle/>
+          <a:p>
+            <a:r>
+              <a:t>Setting: compact income table + pandas profiling</a:t>
+            </a:r>
+          </a:p>
+          <a:p>
+            <a:r>
+              <a:t>Key idea: summaries, distribution checks, missingness</a:t>
+            </a:r>
+          </a:p>
+          <a:p>
+            <a:r>
+              <a:t>Adapt the script to any new CSV</a:t>
+            </a:r>
+          </a:p>
+        </p:txBody>
+      </p:sp>
+      <p:sp>
+        <p:nvSpPr>
+          <p:cNvPr id="4" name="Slide Number Placeholder 3"/>
+          <p:cNvSpPr>
+            <a:spLocks noGrp="1"/>
+          </p:cNvSpPr>
+          <p:nvPr>
+            <p:ph type="sldNum" idx="5" sz="quarter"/>
+          </p:nvPr>
+        </p:nvSpPr>
+        <p:spPr/>
+      </p:sp>
+    </p:spTree>
+  </p:cSld>
+  <p:clrMapOvr>
+    <a:masterClrMapping/>
+  </p:clrMapOvr>
+</p:notes>
 </file>
 
 <file path=ppt/slideLayouts/slideLayout1.xml><?xml version="1.0" encoding="utf-8"?>
@@ -3103,8 +3532,8 @@
         </p:nvSpPr>
         <p:spPr>
           <a:xfrm>
-            <a:off x="548640" y="320040"/>
-            <a:ext cx="11064240" cy="914400"/>
+            <a:off x="548640" y="1828800"/>
+            <a:ext cx="11064240" cy="2743200"/>
           </a:xfrm>
           <a:prstGeom prst="rect">
             <a:avLst/>
@@ -3112,16 +3541,46 @@
           <a:noFill/>
         </p:spPr>
         <p:txBody>
-          <a:bodyPr wrap="none">
-            <a:spAutoFit/>
+          <a:bodyPr wrap="square">
+            <a:noAutofit/>
           </a:bodyPr>
           <a:lstStyle/>
           <a:p>
-            <a:pPr>
-              <a:defRPr sz="3200" b="1"/>
+            <a:pPr algn="ctr">
+              <a:lnSpc>
+                <a:spcPts val="2200"/>
+              </a:lnSpc>
+              <a:spcAft>
+                <a:spcPts val="400"/>
+              </a:spcAft>
             </a:pPr>
             <a:r>
+              <a:rPr sz="4000" b="1">
+                <a:solidFill>
+                  <a:srgbClr val="1A1A2E"/>
+                </a:solidFill>
+                <a:latin typeface="Calibri"/>
+              </a:rPr>
               <a:t>Chapter 1 — Exploring a dataset</a:t>
+            </a:r>
+          </a:p>
+          <a:p>
+            <a:pPr algn="ctr">
+              <a:lnSpc>
+                <a:spcPts val="2200"/>
+              </a:lnSpc>
+              <a:spcBef>
+                <a:spcPts val="1400"/>
+              </a:spcBef>
+            </a:pPr>
+            <a:r>
+              <a:rPr sz="2600" b="0">
+                <a:solidFill>
+                  <a:srgbClr val="333333"/>
+                </a:solidFill>
+                <a:latin typeface="Calibri"/>
+              </a:rPr>
+              <a:t>Discover whether a concrete file meets the quality bar</a:t>
             </a:r>
           </a:p>
         </p:txBody>
@@ -3134,8 +3593,8 @@
         </p:nvSpPr>
         <p:spPr>
           <a:xfrm>
-            <a:off x="731520" y="1280160"/>
-            <a:ext cx="10515600" cy="5029200"/>
+            <a:off x="548640" y="6355080"/>
+            <a:ext cx="11064240" cy="320040"/>
           </a:xfrm>
           <a:prstGeom prst="rect">
             <a:avLst/>
@@ -3144,15 +3603,23 @@
         </p:spPr>
         <p:txBody>
           <a:bodyPr wrap="square">
-            <a:spAutoFit/>
+            <a:noAutofit/>
           </a:bodyPr>
           <a:lstStyle/>
           <a:p>
-            <a:pPr>
-              <a:defRPr sz="2000"/>
+            <a:pPr algn="r">
+              <a:lnSpc>
+                <a:spcPts val="2200"/>
+              </a:lnSpc>
+              <a:defRPr sz="1000" b="0">
+                <a:solidFill>
+                  <a:srgbClr val="666666"/>
+                </a:solidFill>
+                <a:latin typeface="Calibri"/>
+              </a:defRPr>
             </a:pPr>
             <a:r>
-              <a:t>Discover whether a concrete file meets the quality bar</a:t>
+              <a:t>Chapter 1 — Exploring A Dataset</a:t>
             </a:r>
           </a:p>
         </p:txBody>
@@ -3183,8 +3650,8 @@
         </p:nvSpPr>
         <p:spPr>
           <a:xfrm>
-            <a:off x="548640" y="320040"/>
-            <a:ext cx="11064240" cy="914400"/>
+            <a:off x="548640" y="411480"/>
+            <a:ext cx="11064240" cy="777240"/>
           </a:xfrm>
           <a:prstGeom prst="rect">
             <a:avLst/>
@@ -3192,15 +3659,23 @@
           <a:noFill/>
         </p:spPr>
         <p:txBody>
-          <a:bodyPr wrap="none">
-            <a:spAutoFit/>
+          <a:bodyPr wrap="square">
+            <a:noAutofit/>
           </a:bodyPr>
           <a:lstStyle/>
           <a:p>
             <a:pPr>
-              <a:defRPr sz="3200" b="1"/>
+              <a:lnSpc>
+                <a:spcPts val="2200"/>
+              </a:lnSpc>
             </a:pPr>
             <a:r>
+              <a:rPr sz="2800" b="1">
+                <a:solidFill>
+                  <a:srgbClr val="1A1A2E"/>
+                </a:solidFill>
+                <a:latin typeface="Calibri"/>
+              </a:rPr>
               <a:t>Learning objectives</a:t>
             </a:r>
           </a:p>
@@ -3214,8 +3689,8 @@
         </p:nvSpPr>
         <p:spPr>
           <a:xfrm>
-            <a:off x="731520" y="1280160"/>
-            <a:ext cx="10515600" cy="5029200"/>
+            <a:off x="548640" y="1234440"/>
+            <a:ext cx="11064240" cy="4937760"/>
           </a:xfrm>
           <a:prstGeom prst="rect">
             <a:avLst/>
@@ -3224,31 +3699,141 @@
         </p:spPr>
         <p:txBody>
           <a:bodyPr wrap="square">
-            <a:spAutoFit/>
+            <a:noAutofit/>
           </a:bodyPr>
           <a:lstStyle/>
           <a:p>
             <a:pPr>
-              <a:defRPr sz="2000"/>
+              <a:lnSpc>
+                <a:spcPts val="2200"/>
+              </a:lnSpc>
+              <a:spcAft>
+                <a:spcPts val="1000"/>
+              </a:spcAft>
             </a:pPr>
             <a:r>
-              <a:t>State three early questions exploration should answer</a:t>
+              <a:rPr sz="2000" b="0">
+                <a:solidFill>
+                  <a:srgbClr val="333333"/>
+                </a:solidFill>
+                <a:latin typeface="Calibri"/>
+              </a:rPr>
+              <a:t>• State three early questions exploration should</a:t>
             </a:r>
           </a:p>
           <a:p>
             <a:pPr>
-              <a:defRPr sz="2000"/>
+              <a:lnSpc>
+                <a:spcPts val="2200"/>
+              </a:lnSpc>
+              <a:spcAft>
+                <a:spcPts val="1000"/>
+              </a:spcAft>
             </a:pPr>
             <a:r>
-              <a:t>Match common tools to dataset size and structure</a:t>
+              <a:rPr sz="2000" b="0">
+                <a:solidFill>
+                  <a:srgbClr val="333333"/>
+                </a:solidFill>
+                <a:latin typeface="Calibri"/>
+              </a:rPr>
+              <a:t>      answer</a:t>
             </a:r>
           </a:p>
           <a:p>
             <a:pPr>
-              <a:defRPr sz="2000"/>
+              <a:lnSpc>
+                <a:spcPts val="2200"/>
+              </a:lnSpc>
+              <a:spcAft>
+                <a:spcPts val="1000"/>
+              </a:spcAft>
             </a:pPr>
             <a:r>
-              <a:t>Outline a first-pass profiling pattern (summaries + visuals + missingness)</a:t>
+              <a:rPr sz="2000" b="0">
+                <a:solidFill>
+                  <a:srgbClr val="333333"/>
+                </a:solidFill>
+                <a:latin typeface="Calibri"/>
+              </a:rPr>
+              <a:t>• Match common tools to dataset size and structure</a:t>
+            </a:r>
+          </a:p>
+          <a:p>
+            <a:pPr>
+              <a:lnSpc>
+                <a:spcPts val="2200"/>
+              </a:lnSpc>
+              <a:spcAft>
+                <a:spcPts val="1000"/>
+              </a:spcAft>
+            </a:pPr>
+            <a:r>
+              <a:rPr sz="2000" b="0">
+                <a:solidFill>
+                  <a:srgbClr val="333333"/>
+                </a:solidFill>
+                <a:latin typeface="Calibri"/>
+              </a:rPr>
+              <a:t>• Outline a first-pass profiling pattern (summaries +</a:t>
+            </a:r>
+          </a:p>
+          <a:p>
+            <a:pPr>
+              <a:lnSpc>
+                <a:spcPts val="2200"/>
+              </a:lnSpc>
+              <a:spcAft>
+                <a:spcPts val="1000"/>
+              </a:spcAft>
+            </a:pPr>
+            <a:r>
+              <a:rPr sz="2000" b="0">
+                <a:solidFill>
+                  <a:srgbClr val="333333"/>
+                </a:solidFill>
+                <a:latin typeface="Calibri"/>
+              </a:rPr>
+              <a:t>      visuals + missingness)</a:t>
+            </a:r>
+          </a:p>
+        </p:txBody>
+      </p:sp>
+      <p:sp>
+        <p:nvSpPr>
+          <p:cNvPr id="4" name="TextBox 3"/>
+          <p:cNvSpPr txBox="1"/>
+          <p:nvPr/>
+        </p:nvSpPr>
+        <p:spPr>
+          <a:xfrm>
+            <a:off x="548640" y="6355080"/>
+            <a:ext cx="11064240" cy="320040"/>
+          </a:xfrm>
+          <a:prstGeom prst="rect">
+            <a:avLst/>
+          </a:prstGeom>
+          <a:noFill/>
+        </p:spPr>
+        <p:txBody>
+          <a:bodyPr wrap="square">
+            <a:noAutofit/>
+          </a:bodyPr>
+          <a:lstStyle/>
+          <a:p>
+            <a:pPr algn="r">
+              <a:lnSpc>
+                <a:spcPts val="2200"/>
+              </a:lnSpc>
+              <a:defRPr sz="1000" b="0">
+                <a:solidFill>
+                  <a:srgbClr val="666666"/>
+                </a:solidFill>
+                <a:latin typeface="Calibri"/>
+              </a:defRPr>
+            </a:pPr>
+            <a:r>
+              <a:t>Chapter 1 — Exploring A Dataset</a:t>
             </a:r>
           </a:p>
         </p:txBody>
@@ -3279,8 +3864,8 @@
         </p:nvSpPr>
         <p:spPr>
           <a:xfrm>
-            <a:off x="548640" y="320040"/>
-            <a:ext cx="11064240" cy="914400"/>
+            <a:off x="548640" y="411480"/>
+            <a:ext cx="11064240" cy="777240"/>
           </a:xfrm>
           <a:prstGeom prst="rect">
             <a:avLst/>
@@ -3288,15 +3873,23 @@
           <a:noFill/>
         </p:spPr>
         <p:txBody>
-          <a:bodyPr wrap="none">
-            <a:spAutoFit/>
+          <a:bodyPr wrap="square">
+            <a:noAutofit/>
           </a:bodyPr>
           <a:lstStyle/>
           <a:p>
             <a:pPr>
-              <a:defRPr sz="3200" b="1"/>
+              <a:lnSpc>
+                <a:spcPts val="2200"/>
+              </a:lnSpc>
             </a:pPr>
             <a:r>
+              <a:rPr sz="2800" b="1">
+                <a:solidFill>
+                  <a:srgbClr val="1A1A2E"/>
+                </a:solidFill>
+                <a:latin typeface="Calibri"/>
+              </a:rPr>
               <a:t>Why explore first?</a:t>
             </a:r>
           </a:p>
@@ -3310,8 +3903,8 @@
         </p:nvSpPr>
         <p:spPr>
           <a:xfrm>
-            <a:off x="731520" y="1280160"/>
-            <a:ext cx="10515600" cy="5029200"/>
+            <a:off x="548640" y="1234440"/>
+            <a:ext cx="11064240" cy="4937760"/>
           </a:xfrm>
           <a:prstGeom prst="rect">
             <a:avLst/>
@@ -3320,39 +3913,141 @@
         </p:spPr>
         <p:txBody>
           <a:bodyPr wrap="square">
-            <a:spAutoFit/>
+            <a:noAutofit/>
           </a:bodyPr>
           <a:lstStyle/>
           <a:p>
             <a:pPr>
-              <a:defRPr sz="2000"/>
+              <a:lnSpc>
+                <a:spcPts val="2200"/>
+              </a:lnSpc>
+              <a:spcAft>
+                <a:spcPts val="1000"/>
+              </a:spcAft>
             </a:pPr>
             <a:r>
-              <a:t>Turns an unfamiliar file into a mental model</a:t>
+              <a:rPr sz="2000" b="0">
+                <a:solidFill>
+                  <a:srgbClr val="333333"/>
+                </a:solidFill>
+                <a:latin typeface="Calibri"/>
+              </a:rPr>
+              <a:t>• Turns an unfamiliar file into a mental model</a:t>
             </a:r>
           </a:p>
           <a:p>
             <a:pPr>
-              <a:defRPr sz="2000"/>
+              <a:lnSpc>
+                <a:spcPts val="2200"/>
+              </a:lnSpc>
+              <a:spcAft>
+                <a:spcPts val="1000"/>
+              </a:spcAft>
             </a:pPr>
             <a:r>
-              <a:t>Surfaces seasonal patterns, outliers, missing fields</a:t>
+              <a:rPr sz="2000" b="0">
+                <a:solidFill>
+                  <a:srgbClr val="333333"/>
+                </a:solidFill>
+                <a:latin typeface="Calibri"/>
+              </a:rPr>
+              <a:t>• Surfaces seasonal patterns, outliers, missing fields</a:t>
             </a:r>
           </a:p>
           <a:p>
             <a:pPr>
-              <a:defRPr sz="2000"/>
+              <a:lnSpc>
+                <a:spcPts val="2200"/>
+              </a:lnSpc>
+              <a:spcAft>
+                <a:spcPts val="1000"/>
+              </a:spcAft>
             </a:pPr>
             <a:r>
-              <a:t>Shapes which quality issues to prioritize</a:t>
+              <a:rPr sz="2000" b="0">
+                <a:solidFill>
+                  <a:srgbClr val="333333"/>
+                </a:solidFill>
+                <a:latin typeface="Calibri"/>
+              </a:rPr>
+              <a:t>• Shapes which quality issues to prioritize</a:t>
             </a:r>
           </a:p>
           <a:p>
             <a:pPr>
-              <a:defRPr sz="2000"/>
+              <a:lnSpc>
+                <a:spcPts val="2200"/>
+              </a:lnSpc>
+              <a:spcAft>
+                <a:spcPts val="1000"/>
+              </a:spcAft>
             </a:pPr>
             <a:r>
-              <a:t>Does not replace formal cleaning—reveals where it is needed</a:t>
+              <a:rPr sz="2000" b="0">
+                <a:solidFill>
+                  <a:srgbClr val="333333"/>
+                </a:solidFill>
+                <a:latin typeface="Calibri"/>
+              </a:rPr>
+              <a:t>• Does not replace formal cleaning—reveals where it is</a:t>
+            </a:r>
+          </a:p>
+          <a:p>
+            <a:pPr>
+              <a:lnSpc>
+                <a:spcPts val="2200"/>
+              </a:lnSpc>
+              <a:spcAft>
+                <a:spcPts val="1000"/>
+              </a:spcAft>
+            </a:pPr>
+            <a:r>
+              <a:rPr sz="2000" b="0">
+                <a:solidFill>
+                  <a:srgbClr val="333333"/>
+                </a:solidFill>
+                <a:latin typeface="Calibri"/>
+              </a:rPr>
+              <a:t>      needed</a:t>
+            </a:r>
+          </a:p>
+        </p:txBody>
+      </p:sp>
+      <p:sp>
+        <p:nvSpPr>
+          <p:cNvPr id="4" name="TextBox 3"/>
+          <p:cNvSpPr txBox="1"/>
+          <p:nvPr/>
+        </p:nvSpPr>
+        <p:spPr>
+          <a:xfrm>
+            <a:off x="548640" y="6355080"/>
+            <a:ext cx="11064240" cy="320040"/>
+          </a:xfrm>
+          <a:prstGeom prst="rect">
+            <a:avLst/>
+          </a:prstGeom>
+          <a:noFill/>
+        </p:spPr>
+        <p:txBody>
+          <a:bodyPr wrap="square">
+            <a:noAutofit/>
+          </a:bodyPr>
+          <a:lstStyle/>
+          <a:p>
+            <a:pPr algn="r">
+              <a:lnSpc>
+                <a:spcPts val="2200"/>
+              </a:lnSpc>
+              <a:defRPr sz="1000" b="0">
+                <a:solidFill>
+                  <a:srgbClr val="666666"/>
+                </a:solidFill>
+                <a:latin typeface="Calibri"/>
+              </a:defRPr>
+            </a:pPr>
+            <a:r>
+              <a:t>Chapter 1 — Exploring A Dataset</a:t>
             </a:r>
           </a:p>
         </p:txBody>
@@ -3383,8 +4078,8 @@
         </p:nvSpPr>
         <p:spPr>
           <a:xfrm>
-            <a:off x="548640" y="320040"/>
-            <a:ext cx="11064240" cy="914400"/>
+            <a:off x="548640" y="411480"/>
+            <a:ext cx="11064240" cy="777240"/>
           </a:xfrm>
           <a:prstGeom prst="rect">
             <a:avLst/>
@@ -3392,15 +4087,23 @@
           <a:noFill/>
         </p:spPr>
         <p:txBody>
-          <a:bodyPr wrap="none">
-            <a:spAutoFit/>
+          <a:bodyPr wrap="square">
+            <a:noAutofit/>
           </a:bodyPr>
           <a:lstStyle/>
           <a:p>
             <a:pPr>
-              <a:defRPr sz="3200" b="1"/>
+              <a:lnSpc>
+                <a:spcPts val="2200"/>
+              </a:lnSpc>
             </a:pPr>
             <a:r>
+              <a:rPr sz="2800" b="1">
+                <a:solidFill>
+                  <a:srgbClr val="1A1A2E"/>
+                </a:solidFill>
+                <a:latin typeface="Calibri"/>
+              </a:rPr>
               <a:t>Three early questions</a:t>
             </a:r>
           </a:p>
@@ -3414,8 +4117,8 @@
         </p:nvSpPr>
         <p:spPr>
           <a:xfrm>
-            <a:off x="731520" y="1280160"/>
-            <a:ext cx="10515600" cy="5029200"/>
+            <a:off x="548640" y="1234440"/>
+            <a:ext cx="11064240" cy="4937760"/>
           </a:xfrm>
           <a:prstGeom prst="rect">
             <a:avLst/>
@@ -3424,31 +4127,103 @@
         </p:spPr>
         <p:txBody>
           <a:bodyPr wrap="square">
-            <a:spAutoFit/>
+            <a:noAutofit/>
           </a:bodyPr>
           <a:lstStyle/>
           <a:p>
             <a:pPr>
-              <a:defRPr sz="2000"/>
+              <a:lnSpc>
+                <a:spcPts val="2200"/>
+              </a:lnSpc>
+              <a:spcAft>
+                <a:spcPts val="1000"/>
+              </a:spcAft>
             </a:pPr>
             <a:r>
-              <a:t>What is in the table?</a:t>
+              <a:rPr sz="2000" b="0">
+                <a:solidFill>
+                  <a:srgbClr val="333333"/>
+                </a:solidFill>
+                <a:latin typeface="Calibri"/>
+              </a:rPr>
+              <a:t>• What is in the table?</a:t>
             </a:r>
           </a:p>
           <a:p>
             <a:pPr>
-              <a:defRPr sz="2000"/>
+              <a:lnSpc>
+                <a:spcPts val="2200"/>
+              </a:lnSpc>
+              <a:spcAft>
+                <a:spcPts val="1000"/>
+              </a:spcAft>
             </a:pPr>
             <a:r>
-              <a:t>What looks suspicious?</a:t>
+              <a:rPr sz="2000" b="0">
+                <a:solidFill>
+                  <a:srgbClr val="333333"/>
+                </a:solidFill>
+                <a:latin typeface="Calibri"/>
+              </a:rPr>
+              <a:t>• What looks suspicious?</a:t>
             </a:r>
           </a:p>
           <a:p>
             <a:pPr>
-              <a:defRPr sz="2000"/>
+              <a:lnSpc>
+                <a:spcPts val="2200"/>
+              </a:lnSpc>
+              <a:spcAft>
+                <a:spcPts val="1000"/>
+              </a:spcAft>
             </a:pPr>
             <a:r>
-              <a:t>What analysis goals remain feasible given defects?</a:t>
+              <a:rPr sz="2000" b="0">
+                <a:solidFill>
+                  <a:srgbClr val="333333"/>
+                </a:solidFill>
+                <a:latin typeface="Calibri"/>
+              </a:rPr>
+              <a:t>• What analysis goals remain feasible given defects?</a:t>
+            </a:r>
+          </a:p>
+        </p:txBody>
+      </p:sp>
+      <p:sp>
+        <p:nvSpPr>
+          <p:cNvPr id="4" name="TextBox 3"/>
+          <p:cNvSpPr txBox="1"/>
+          <p:nvPr/>
+        </p:nvSpPr>
+        <p:spPr>
+          <a:xfrm>
+            <a:off x="548640" y="6355080"/>
+            <a:ext cx="11064240" cy="320040"/>
+          </a:xfrm>
+          <a:prstGeom prst="rect">
+            <a:avLst/>
+          </a:prstGeom>
+          <a:noFill/>
+        </p:spPr>
+        <p:txBody>
+          <a:bodyPr wrap="square">
+            <a:noAutofit/>
+          </a:bodyPr>
+          <a:lstStyle/>
+          <a:p>
+            <a:pPr algn="r">
+              <a:lnSpc>
+                <a:spcPts val="2200"/>
+              </a:lnSpc>
+              <a:defRPr sz="1000" b="0">
+                <a:solidFill>
+                  <a:srgbClr val="666666"/>
+                </a:solidFill>
+                <a:latin typeface="Calibri"/>
+              </a:defRPr>
+            </a:pPr>
+            <a:r>
+              <a:t>Chapter 1 — Exploring A Dataset</a:t>
             </a:r>
           </a:p>
         </p:txBody>
@@ -3479,8 +4254,8 @@
         </p:nvSpPr>
         <p:spPr>
           <a:xfrm>
-            <a:off x="548640" y="320040"/>
-            <a:ext cx="11064240" cy="914400"/>
+            <a:off x="548640" y="411480"/>
+            <a:ext cx="11064240" cy="777240"/>
           </a:xfrm>
           <a:prstGeom prst="rect">
             <a:avLst/>
@@ -3488,15 +4263,23 @@
           <a:noFill/>
         </p:spPr>
         <p:txBody>
-          <a:bodyPr wrap="none">
-            <a:spAutoFit/>
+          <a:bodyPr wrap="square">
+            <a:noAutofit/>
           </a:bodyPr>
           <a:lstStyle/>
           <a:p>
             <a:pPr>
-              <a:defRPr sz="3200" b="1"/>
+              <a:lnSpc>
+                <a:spcPts val="2200"/>
+              </a:lnSpc>
             </a:pPr>
             <a:r>
+              <a:rPr sz="2800" b="1">
+                <a:solidFill>
+                  <a:srgbClr val="1A1A2E"/>
+                </a:solidFill>
+                <a:latin typeface="Calibri"/>
+              </a:rPr>
               <a:t>Tools for exploration</a:t>
             </a:r>
           </a:p>
@@ -3510,8 +4293,8 @@
         </p:nvSpPr>
         <p:spPr>
           <a:xfrm>
-            <a:off x="731520" y="1280160"/>
-            <a:ext cx="10515600" cy="5029200"/>
+            <a:off x="548640" y="1234440"/>
+            <a:ext cx="11064240" cy="4937760"/>
           </a:xfrm>
           <a:prstGeom prst="rect">
             <a:avLst/>
@@ -3520,39 +4303,122 @@
         </p:spPr>
         <p:txBody>
           <a:bodyPr wrap="square">
-            <a:spAutoFit/>
+            <a:noAutofit/>
           </a:bodyPr>
           <a:lstStyle/>
           <a:p>
             <a:pPr>
-              <a:defRPr sz="2000"/>
+              <a:lnSpc>
+                <a:spcPts val="2200"/>
+              </a:lnSpc>
+              <a:spcAft>
+                <a:spcPts val="1000"/>
+              </a:spcAft>
             </a:pPr>
             <a:r>
-              <a:t>Spreadsheets — small tables, quick looks</a:t>
+              <a:rPr sz="2000" b="0">
+                <a:solidFill>
+                  <a:srgbClr val="333333"/>
+                </a:solidFill>
+                <a:latin typeface="Calibri"/>
+              </a:rPr>
+              <a:t>• Spreadsheets — small tables, quick looks</a:t>
             </a:r>
           </a:p>
           <a:p>
             <a:pPr>
-              <a:defRPr sz="2000"/>
+              <a:lnSpc>
+                <a:spcPts val="2200"/>
+              </a:lnSpc>
+              <a:spcAft>
+                <a:spcPts val="1000"/>
+              </a:spcAft>
             </a:pPr>
             <a:r>
-              <a:t>SQL — filter and aggregate relational stores</a:t>
+              <a:rPr sz="2000" b="0">
+                <a:solidFill>
+                  <a:srgbClr val="333333"/>
+                </a:solidFill>
+                <a:latin typeface="Calibri"/>
+              </a:rPr>
+              <a:t>• SQL — filter and aggregate relational stores</a:t>
             </a:r>
           </a:p>
           <a:p>
             <a:pPr>
-              <a:defRPr sz="2000"/>
+              <a:lnSpc>
+                <a:spcPts val="2200"/>
+              </a:lnSpc>
+              <a:spcAft>
+                <a:spcPts val="1000"/>
+              </a:spcAft>
             </a:pPr>
             <a:r>
-              <a:t>pandas — reproducible profiling scripts</a:t>
+              <a:rPr sz="2000" b="0">
+                <a:solidFill>
+                  <a:srgbClr val="333333"/>
+                </a:solidFill>
+                <a:latin typeface="Calibri"/>
+              </a:rPr>
+              <a:t>• pandas — reproducible profiling scripts</a:t>
             </a:r>
           </a:p>
           <a:p>
             <a:pPr>
-              <a:defRPr sz="2000"/>
+              <a:lnSpc>
+                <a:spcPts val="2200"/>
+              </a:lnSpc>
+              <a:spcAft>
+                <a:spcPts val="1000"/>
+              </a:spcAft>
             </a:pPr>
             <a:r>
-              <a:t>Tableau / Power BI — shared interactive views</a:t>
+              <a:rPr sz="2000" b="0">
+                <a:solidFill>
+                  <a:srgbClr val="333333"/>
+                </a:solidFill>
+                <a:latin typeface="Calibri"/>
+              </a:rPr>
+              <a:t>• Tableau / Power BI — shared interactive views</a:t>
+            </a:r>
+          </a:p>
+        </p:txBody>
+      </p:sp>
+      <p:sp>
+        <p:nvSpPr>
+          <p:cNvPr id="4" name="TextBox 3"/>
+          <p:cNvSpPr txBox="1"/>
+          <p:nvPr/>
+        </p:nvSpPr>
+        <p:spPr>
+          <a:xfrm>
+            <a:off x="548640" y="6355080"/>
+            <a:ext cx="11064240" cy="320040"/>
+          </a:xfrm>
+          <a:prstGeom prst="rect">
+            <a:avLst/>
+          </a:prstGeom>
+          <a:noFill/>
+        </p:spPr>
+        <p:txBody>
+          <a:bodyPr wrap="square">
+            <a:noAutofit/>
+          </a:bodyPr>
+          <a:lstStyle/>
+          <a:p>
+            <a:pPr algn="r">
+              <a:lnSpc>
+                <a:spcPts val="2200"/>
+              </a:lnSpc>
+              <a:defRPr sz="1000" b="0">
+                <a:solidFill>
+                  <a:srgbClr val="666666"/>
+                </a:solidFill>
+                <a:latin typeface="Calibri"/>
+              </a:defRPr>
+            </a:pPr>
+            <a:r>
+              <a:t>Chapter 1 — Exploring A Dataset</a:t>
             </a:r>
           </a:p>
         </p:txBody>
@@ -3583,8 +4449,8 @@
         </p:nvSpPr>
         <p:spPr>
           <a:xfrm>
-            <a:off x="548640" y="320040"/>
-            <a:ext cx="11064240" cy="914400"/>
+            <a:off x="548640" y="411480"/>
+            <a:ext cx="11064240" cy="777240"/>
           </a:xfrm>
           <a:prstGeom prst="rect">
             <a:avLst/>
@@ -3592,15 +4458,23 @@
           <a:noFill/>
         </p:spPr>
         <p:txBody>
-          <a:bodyPr wrap="none">
-            <a:spAutoFit/>
+          <a:bodyPr wrap="square">
+            <a:noAutofit/>
           </a:bodyPr>
           <a:lstStyle/>
           <a:p>
             <a:pPr>
-              <a:defRPr sz="3200" b="1"/>
+              <a:lnSpc>
+                <a:spcPts val="2200"/>
+              </a:lnSpc>
             </a:pPr>
             <a:r>
+              <a:rPr sz="2800" b="1">
+                <a:solidFill>
+                  <a:srgbClr val="1A1A2E"/>
+                </a:solidFill>
+                <a:latin typeface="Calibri"/>
+              </a:rPr>
               <a:t>Example 1.20 — Household incomes EDA</a:t>
             </a:r>
           </a:p>
@@ -3614,8 +4488,52 @@
         </p:nvSpPr>
         <p:spPr>
           <a:xfrm>
-            <a:off x="731520" y="1280160"/>
-            <a:ext cx="10515600" cy="5029200"/>
+            <a:off x="548640" y="1051560"/>
+            <a:ext cx="11064240" cy="914400"/>
+          </a:xfrm>
+          <a:prstGeom prst="rect">
+            <a:avLst/>
+          </a:prstGeom>
+          <a:solidFill>
+            <a:srgbClr val="F4F4F4"/>
+          </a:solidFill>
+        </p:spPr>
+        <p:txBody>
+          <a:bodyPr wrap="square">
+            <a:noAutofit/>
+          </a:bodyPr>
+          <a:lstStyle/>
+          <a:p>
+            <a:pPr>
+              <a:lnSpc>
+                <a:spcPts val="2200"/>
+              </a:lnSpc>
+              <a:spcAft>
+                <a:spcPts val="200"/>
+              </a:spcAft>
+            </a:pPr>
+            <a:r>
+              <a:rPr sz="2000" b="0">
+                <a:solidFill>
+                  <a:srgbClr val="333333"/>
+                </a:solidFill>
+                <a:latin typeface="Consolas"/>
+              </a:rPr>
+              <a:t>$ cd modules/chapter1/example20/ &amp;&amp; bash run.sh</a:t>
+            </a:r>
+          </a:p>
+        </p:txBody>
+      </p:sp>
+      <p:sp>
+        <p:nvSpPr>
+          <p:cNvPr id="4" name="TextBox 3"/>
+          <p:cNvSpPr txBox="1"/>
+          <p:nvPr/>
+        </p:nvSpPr>
+        <p:spPr>
+          <a:xfrm>
+            <a:off x="548640" y="6355080"/>
+            <a:ext cx="11064240" cy="320040"/>
           </a:xfrm>
           <a:prstGeom prst="rect">
             <a:avLst/>
@@ -3624,39 +4542,23 @@
         </p:spPr>
         <p:txBody>
           <a:bodyPr wrap="square">
-            <a:spAutoFit/>
+            <a:noAutofit/>
           </a:bodyPr>
           <a:lstStyle/>
           <a:p>
-            <a:pPr>
-              <a:defRPr sz="2000"/>
+            <a:pPr algn="r">
+              <a:lnSpc>
+                <a:spcPts val="2200"/>
+              </a:lnSpc>
+              <a:defRPr sz="1000" b="0">
+                <a:solidFill>
+                  <a:srgbClr val="666666"/>
+                </a:solidFill>
+                <a:latin typeface="Calibri"/>
+              </a:defRPr>
             </a:pPr>
             <a:r>
-              <a:t>Setting: compact income table + pandas profiling</a:t>
-            </a:r>
-          </a:p>
-          <a:p>
-            <a:pPr>
-              <a:defRPr sz="2000"/>
-            </a:pPr>
-            <a:r>
-              <a:t>Key idea: summaries, distribution checks, missingness</a:t>
-            </a:r>
-          </a:p>
-          <a:p>
-            <a:pPr>
-              <a:defRPr sz="2000"/>
-            </a:pPr>
-            <a:r>
-              <a:t>Adapt the script to any new CSV</a:t>
-            </a:r>
-          </a:p>
-          <a:p>
-            <a:pPr>
-              <a:defRPr sz="2000"/>
-            </a:pPr>
-            <a:r>
-              <a:t>Try it: `modules/chapter1/example20/`</a:t>
+              <a:t>Chapter 1 — Exploring A Dataset</a:t>
             </a:r>
           </a:p>
         </p:txBody>
@@ -3687,8 +4589,8 @@
         </p:nvSpPr>
         <p:spPr>
           <a:xfrm>
-            <a:off x="548640" y="320040"/>
-            <a:ext cx="11064240" cy="914400"/>
+            <a:off x="548640" y="411480"/>
+            <a:ext cx="11064240" cy="777240"/>
           </a:xfrm>
           <a:prstGeom prst="rect">
             <a:avLst/>
@@ -3696,15 +4598,23 @@
           <a:noFill/>
         </p:spPr>
         <p:txBody>
-          <a:bodyPr wrap="none">
-            <a:spAutoFit/>
+          <a:bodyPr wrap="square">
+            <a:noAutofit/>
           </a:bodyPr>
           <a:lstStyle/>
           <a:p>
             <a:pPr>
-              <a:defRPr sz="3200" b="1"/>
+              <a:lnSpc>
+                <a:spcPts val="2200"/>
+              </a:lnSpc>
             </a:pPr>
             <a:r>
+              <a:rPr sz="2800" b="1">
+                <a:solidFill>
+                  <a:srgbClr val="1A1A2E"/>
+                </a:solidFill>
+                <a:latin typeface="Calibri"/>
+              </a:rPr>
               <a:t>Takeaways</a:t>
             </a:r>
           </a:p>
@@ -3718,8 +4628,8 @@
         </p:nvSpPr>
         <p:spPr>
           <a:xfrm>
-            <a:off x="731520" y="1280160"/>
-            <a:ext cx="10515600" cy="5029200"/>
+            <a:off x="548640" y="1234440"/>
+            <a:ext cx="11064240" cy="4937760"/>
           </a:xfrm>
           <a:prstGeom prst="rect">
             <a:avLst/>
@@ -3728,63 +4638,78 @@
         </p:spPr>
         <p:txBody>
           <a:bodyPr wrap="square">
-            <a:spAutoFit/>
+            <a:noAutofit/>
           </a:bodyPr>
           <a:lstStyle/>
           <a:p>
             <a:pPr>
-              <a:defRPr sz="2000"/>
+              <a:lnSpc>
+                <a:spcPts val="2200"/>
+              </a:lnSpc>
+              <a:spcAft>
+                <a:spcPts val="1000"/>
+              </a:spcAft>
             </a:pPr>
             <a:r>
-              <a:t>Explore before modeling to set expectations</a:t>
+              <a:rPr sz="2000" b="0">
+                <a:solidFill>
+                  <a:srgbClr val="333333"/>
+                </a:solidFill>
+                <a:latin typeface="Calibri"/>
+              </a:rPr>
+              <a:t>• Explore before modeling to set expectations</a:t>
             </a:r>
           </a:p>
           <a:p>
             <a:pPr>
-              <a:defRPr sz="2000"/>
+              <a:lnSpc>
+                <a:spcPts val="2200"/>
+              </a:lnSpc>
+              <a:spcAft>
+                <a:spcPts val="1000"/>
+              </a:spcAft>
             </a:pPr>
             <a:r>
-              <a:t>Tool choice follows size, structure, and audience</a:t>
+              <a:rPr sz="2000" b="0">
+                <a:solidFill>
+                  <a:srgbClr val="333333"/>
+                </a:solidFill>
+                <a:latin typeface="Calibri"/>
+              </a:rPr>
+              <a:t>• Tool choice follows size, structure, and audience</a:t>
             </a:r>
           </a:p>
           <a:p>
             <a:pPr>
-              <a:defRPr sz="2000"/>
+              <a:lnSpc>
+                <a:spcPts val="2200"/>
+              </a:lnSpc>
+              <a:spcAft>
+                <a:spcPts val="1000"/>
+              </a:spcAft>
             </a:pPr>
             <a:r>
-              <a:t>Document what you inspected and what you will fix</a:t>
-            </a:r>
-          </a:p>
-        </p:txBody>
-      </p:sp>
-    </p:spTree>
-  </p:cSld>
-  <p:clrMapOvr>
-    <a:masterClrMapping/>
-  </p:clrMapOvr>
-</p:sld>
-</file>
-
-<file path=ppt/slides/slide8.xml><?xml version="1.0" encoding="utf-8"?>
-<p:sld xmlns:a="http://schemas.openxmlformats.org/drawingml/2006/main" xmlns:p="http://schemas.openxmlformats.org/presentationml/2006/main" xmlns:r="http://schemas.openxmlformats.org/officeDocument/2006/relationships">
-  <p:cSld>
-    <p:spTree>
-      <p:nvGrpSpPr>
-        <p:cNvPr id="1" name=""/>
-        <p:cNvGrpSpPr/>
-        <p:nvPr/>
-      </p:nvGrpSpPr>
-      <p:grpSpPr/>
-      <p:sp>
-        <p:nvSpPr>
-          <p:cNvPr id="2" name="TextBox 1"/>
+              <a:rPr sz="2000" b="0">
+                <a:solidFill>
+                  <a:srgbClr val="333333"/>
+                </a:solidFill>
+                <a:latin typeface="Calibri"/>
+              </a:rPr>
+              <a:t>• Document what you inspected and what you will fix</a:t>
+            </a:r>
+          </a:p>
+        </p:txBody>
+      </p:sp>
+      <p:sp>
+        <p:nvSpPr>
+          <p:cNvPr id="4" name="TextBox 3"/>
           <p:cNvSpPr txBox="1"/>
           <p:nvPr/>
         </p:nvSpPr>
         <p:spPr>
           <a:xfrm>
-            <a:off x="548640" y="320040"/>
-            <a:ext cx="11064240" cy="914400"/>
+            <a:off x="548640" y="6355080"/>
+            <a:ext cx="11064240" cy="320040"/>
           </a:xfrm>
           <a:prstGeom prst="rect">
             <a:avLst/>
@@ -3792,55 +4717,24 @@
           <a:noFill/>
         </p:spPr>
         <p:txBody>
-          <a:bodyPr wrap="none">
-            <a:spAutoFit/>
+          <a:bodyPr wrap="square">
+            <a:noAutofit/>
           </a:bodyPr>
           <a:lstStyle/>
           <a:p>
-            <a:pPr>
-              <a:defRPr sz="3200" b="1"/>
+            <a:pPr algn="r">
+              <a:lnSpc>
+                <a:spcPts val="2200"/>
+              </a:lnSpc>
+              <a:defRPr sz="1000" b="0">
+                <a:solidFill>
+                  <a:srgbClr val="666666"/>
+                </a:solidFill>
+                <a:latin typeface="Calibri"/>
+              </a:defRPr>
             </a:pPr>
             <a:r>
-              <a:t>Next</a:t>
-            </a:r>
-          </a:p>
-        </p:txBody>
-      </p:sp>
-      <p:sp>
-        <p:nvSpPr>
-          <p:cNvPr id="3" name="TextBox 2"/>
-          <p:cNvSpPr txBox="1"/>
-          <p:nvPr/>
-        </p:nvSpPr>
-        <p:spPr>
-          <a:xfrm>
-            <a:off x="731520" y="1280160"/>
-            <a:ext cx="10515600" cy="5029200"/>
-          </a:xfrm>
-          <a:prstGeom prst="rect">
-            <a:avLst/>
-          </a:prstGeom>
-          <a:noFill/>
-        </p:spPr>
-        <p:txBody>
-          <a:bodyPr wrap="square">
-            <a:spAutoFit/>
-          </a:bodyPr>
-          <a:lstStyle/>
-          <a:p>
-            <a:pPr>
-              <a:defRPr sz="2000"/>
-            </a:pPr>
-            <a:r>
-              <a:t>Complete the quiz for this clip</a:t>
-            </a:r>
-          </a:p>
-          <a:p>
-            <a:pPr>
-              <a:defRPr sz="2000"/>
-            </a:pPr>
-            <a:r>
-              <a:t>Then continue to: Uses of datasets</a:t>
+              <a:t>Chapter 1 — Exploring A Dataset</a:t>
             </a:r>
           </a:p>
         </p:txBody>
@@ -4171,4 +5065,324 @@
   </a:objectDefaults>
   <a:extraClrSchemeLst/>
 </a:theme>
+</file>
+
+<file path=ppt/theme/theme2.xml><?xml version="1.0" encoding="utf-8"?>
+<a:theme xmlns:a="http://schemas.openxmlformats.org/drawingml/2006/main" name="Office Theme">
+  <a:themeElements>
+    <a:clrScheme name="Office">
+      <a:dk1>
+        <a:sysClr val="windowText" lastClr="000000"/>
+      </a:dk1>
+      <a:lt1>
+        <a:sysClr val="window" lastClr="FFFFFF"/>
+      </a:lt1>
+      <a:dk2>
+        <a:srgbClr val="1F497D"/>
+      </a:dk2>
+      <a:lt2>
+        <a:srgbClr val="EEECE1"/>
+      </a:lt2>
+      <a:accent1>
+        <a:srgbClr val="4F81BD"/>
+      </a:accent1>
+      <a:accent2>
+        <a:srgbClr val="C0504D"/>
+      </a:accent2>
+      <a:accent3>
+        <a:srgbClr val="9BBB59"/>
+      </a:accent3>
+      <a:accent4>
+        <a:srgbClr val="8064A2"/>
+      </a:accent4>
+      <a:accent5>
+        <a:srgbClr val="4BACC6"/>
+      </a:accent5>
+      <a:accent6>
+        <a:srgbClr val="F79646"/>
+      </a:accent6>
+      <a:hlink>
+        <a:srgbClr val="0000FF"/>
+      </a:hlink>
+      <a:folHlink>
+        <a:srgbClr val="800080"/>
+      </a:folHlink>
+    </a:clrScheme>
+    <a:fontScheme name="Office">
+      <a:majorFont>
+        <a:latin typeface="Calibri"/>
+        <a:ea typeface=""/>
+        <a:cs typeface=""/>
+        <a:font script="Jpan" typeface="ＭＳ Ｐゴシック"/>
+        <a:font script="Hang" typeface="맑은 고딕"/>
+        <a:font script="Hans" typeface="宋体"/>
+        <a:font script="Hant" typeface="新細明體"/>
+        <a:font script="Arab" typeface="Times New Roman"/>
+        <a:font script="Hebr" typeface="Times New Roman"/>
+        <a:font script="Thai" typeface="Angsana New"/>
+        <a:font script="Ethi" typeface="Nyala"/>
+        <a:font script="Beng" typeface="Vrinda"/>
+        <a:font script="Gujr" typeface="Shruti"/>
+        <a:font script="Khmr" typeface="MoolBoran"/>
+        <a:font script="Knda" typeface="Tunga"/>
+        <a:font script="Guru" typeface="Raavi"/>
+        <a:font script="Cans" typeface="Euphemia"/>
+        <a:font script="Cher" typeface="Plantagenet Cherokee"/>
+        <a:font script="Yiii" typeface="Microsoft Yi Baiti"/>
+        <a:font script="Tibt" typeface="Microsoft Himalaya"/>
+        <a:font script="Thaa" typeface="MV Boli"/>
+        <a:font script="Deva" typeface="Mangal"/>
+        <a:font script="Telu" typeface="Gautami"/>
+        <a:font script="Taml" typeface="Latha"/>
+        <a:font script="Syrc" typeface="Estrangelo Edessa"/>
+        <a:font script="Orya" typeface="Kalinga"/>
+        <a:font script="Mlym" typeface="Kartika"/>
+        <a:font script="Laoo" typeface="DokChampa"/>
+        <a:font script="Sinh" typeface="Iskoola Pota"/>
+        <a:font script="Mong" typeface="Mongolian Baiti"/>
+        <a:font script="Viet" typeface="Times New Roman"/>
+        <a:font script="Uigh" typeface="Microsoft Uighur"/>
+        <a:font script="Geor" typeface="Sylfaen"/>
+      </a:majorFont>
+      <a:minorFont>
+        <a:latin typeface="Calibri"/>
+        <a:ea typeface=""/>
+        <a:cs typeface=""/>
+        <a:font script="Jpan" typeface="ＭＳ Ｐゴシック"/>
+        <a:font script="Hang" typeface="맑은 고딕"/>
+        <a:font script="Hans" typeface="宋体"/>
+        <a:font script="Hant" typeface="新細明體"/>
+        <a:font script="Arab" typeface="Arial"/>
+        <a:font script="Hebr" typeface="Arial"/>
+        <a:font script="Thai" typeface="Cordia New"/>
+        <a:font script="Ethi" typeface="Nyala"/>
+        <a:font script="Beng" typeface="Vrinda"/>
+        <a:font script="Gujr" typeface="Shruti"/>
+        <a:font script="Khmr" typeface="DaunPenh"/>
+        <a:font script="Knda" typeface="Tunga"/>
+        <a:font script="Guru" typeface="Raavi"/>
+        <a:font script="Cans" typeface="Euphemia"/>
+        <a:font script="Cher" typeface="Plantagenet Cherokee"/>
+        <a:font script="Yiii" typeface="Microsoft Yi Baiti"/>
+        <a:font script="Tibt" typeface="Microsoft Himalaya"/>
+        <a:font script="Thaa" typeface="MV Boli"/>
+        <a:font script="Deva" typeface="Mangal"/>
+        <a:font script="Telu" typeface="Gautami"/>
+        <a:font script="Taml" typeface="Latha"/>
+        <a:font script="Syrc" typeface="Estrangelo Edessa"/>
+        <a:font script="Orya" typeface="Kalinga"/>
+        <a:font script="Mlym" typeface="Kartika"/>
+        <a:font script="Laoo" typeface="DokChampa"/>
+        <a:font script="Sinh" typeface="Iskoola Pota"/>
+        <a:font script="Mong" typeface="Mongolian Baiti"/>
+        <a:font script="Viet" typeface="Arial"/>
+        <a:font script="Uigh" typeface="Microsoft Uighur"/>
+        <a:font script="Geor" typeface="Sylfaen"/>
+      </a:minorFont>
+    </a:fontScheme>
+    <a:fmtScheme name="Office">
+      <a:fillStyleLst>
+        <a:solidFill>
+          <a:schemeClr val="phClr"/>
+        </a:solidFill>
+        <a:gradFill rotWithShape="1">
+          <a:gsLst>
+            <a:gs pos="0">
+              <a:schemeClr val="phClr">
+                <a:tint val="50000"/>
+                <a:satMod val="300000"/>
+              </a:schemeClr>
+            </a:gs>
+            <a:gs pos="35000">
+              <a:schemeClr val="phClr">
+                <a:tint val="37000"/>
+                <a:satMod val="300000"/>
+              </a:schemeClr>
+            </a:gs>
+            <a:gs pos="100000">
+              <a:schemeClr val="phClr">
+                <a:tint val="15000"/>
+                <a:satMod val="350000"/>
+              </a:schemeClr>
+            </a:gs>
+          </a:gsLst>
+          <a:lin ang="16200000" scaled="1"/>
+        </a:gradFill>
+        <a:gradFill rotWithShape="1">
+          <a:gsLst>
+            <a:gs pos="0">
+              <a:schemeClr val="phClr">
+                <a:tint val="100000"/>
+                <a:shade val="100000"/>
+                <a:satMod val="130000"/>
+              </a:schemeClr>
+            </a:gs>
+            <a:gs pos="100000">
+              <a:schemeClr val="phClr">
+                <a:tint val="50000"/>
+                <a:shade val="100000"/>
+                <a:satMod val="350000"/>
+              </a:schemeClr>
+            </a:gs>
+          </a:gsLst>
+          <a:lin ang="16200000" scaled="0"/>
+        </a:gradFill>
+      </a:fillStyleLst>
+      <a:lnStyleLst>
+        <a:ln w="9525" cap="flat" cmpd="sng" algn="ctr">
+          <a:solidFill>
+            <a:schemeClr val="phClr">
+              <a:shade val="95000"/>
+              <a:satMod val="105000"/>
+            </a:schemeClr>
+          </a:solidFill>
+          <a:prstDash val="solid"/>
+        </a:ln>
+        <a:ln w="25400" cap="flat" cmpd="sng" algn="ctr">
+          <a:solidFill>
+            <a:schemeClr val="phClr"/>
+          </a:solidFill>
+          <a:prstDash val="solid"/>
+        </a:ln>
+        <a:ln w="38100" cap="flat" cmpd="sng" algn="ctr">
+          <a:solidFill>
+            <a:schemeClr val="phClr"/>
+          </a:solidFill>
+          <a:prstDash val="solid"/>
+        </a:ln>
+      </a:lnStyleLst>
+      <a:effectStyleLst>
+        <a:effectStyle>
+          <a:effectLst>
+            <a:outerShdw blurRad="40000" dist="20000" dir="5400000" rotWithShape="0">
+              <a:srgbClr val="000000">
+                <a:alpha val="38000"/>
+              </a:srgbClr>
+            </a:outerShdw>
+          </a:effectLst>
+        </a:effectStyle>
+        <a:effectStyle>
+          <a:effectLst>
+            <a:outerShdw blurRad="40000" dist="23000" dir="5400000" rotWithShape="0">
+              <a:srgbClr val="000000">
+                <a:alpha val="35000"/>
+              </a:srgbClr>
+            </a:outerShdw>
+          </a:effectLst>
+        </a:effectStyle>
+        <a:effectStyle>
+          <a:effectLst>
+            <a:outerShdw blurRad="40000" dist="23000" dir="5400000" rotWithShape="0">
+              <a:srgbClr val="000000">
+                <a:alpha val="35000"/>
+              </a:srgbClr>
+            </a:outerShdw>
+          </a:effectLst>
+          <a:scene3d>
+            <a:camera prst="orthographicFront">
+              <a:rot lat="0" lon="0" rev="0"/>
+            </a:camera>
+            <a:lightRig rig="threePt" dir="t">
+              <a:rot lat="0" lon="0" rev="1200000"/>
+            </a:lightRig>
+          </a:scene3d>
+          <a:sp3d>
+            <a:bevelT w="63500" h="25400"/>
+          </a:sp3d>
+        </a:effectStyle>
+      </a:effectStyleLst>
+      <a:bgFillStyleLst>
+        <a:solidFill>
+          <a:schemeClr val="phClr"/>
+        </a:solidFill>
+        <a:gradFill rotWithShape="1">
+          <a:gsLst>
+            <a:gs pos="0">
+              <a:schemeClr val="phClr">
+                <a:tint val="40000"/>
+                <a:satMod val="350000"/>
+              </a:schemeClr>
+            </a:gs>
+            <a:gs pos="40000">
+              <a:schemeClr val="phClr">
+                <a:tint val="45000"/>
+                <a:shade val="99000"/>
+                <a:satMod val="350000"/>
+              </a:schemeClr>
+            </a:gs>
+            <a:gs pos="100000">
+              <a:schemeClr val="phClr">
+                <a:shade val="20000"/>
+                <a:satMod val="255000"/>
+              </a:schemeClr>
+            </a:gs>
+          </a:gsLst>
+          <a:path path="circle">
+            <a:fillToRect l="50000" t="-80000" r="50000" b="180000"/>
+          </a:path>
+        </a:gradFill>
+        <a:gradFill rotWithShape="1">
+          <a:gsLst>
+            <a:gs pos="0">
+              <a:schemeClr val="phClr">
+                <a:tint val="80000"/>
+                <a:satMod val="300000"/>
+              </a:schemeClr>
+            </a:gs>
+            <a:gs pos="100000">
+              <a:schemeClr val="phClr">
+                <a:shade val="30000"/>
+                <a:satMod val="200000"/>
+              </a:schemeClr>
+            </a:gs>
+          </a:gsLst>
+          <a:path path="circle">
+            <a:fillToRect l="50000" t="50000" r="50000" b="50000"/>
+          </a:path>
+        </a:gradFill>
+      </a:bgFillStyleLst>
+    </a:fmtScheme>
+  </a:themeElements>
+  <a:objectDefaults>
+    <a:spDef>
+      <a:spPr/>
+      <a:bodyPr/>
+      <a:lstStyle/>
+      <a:style>
+        <a:lnRef idx="1">
+          <a:schemeClr val="accent1"/>
+        </a:lnRef>
+        <a:fillRef idx="3">
+          <a:schemeClr val="accent1"/>
+        </a:fillRef>
+        <a:effectRef idx="2">
+          <a:schemeClr val="accent1"/>
+        </a:effectRef>
+        <a:fontRef idx="minor">
+          <a:schemeClr val="lt1"/>
+        </a:fontRef>
+      </a:style>
+    </a:spDef>
+    <a:lnDef>
+      <a:spPr/>
+      <a:bodyPr/>
+      <a:lstStyle/>
+      <a:style>
+        <a:lnRef idx="2">
+          <a:schemeClr val="accent1"/>
+        </a:lnRef>
+        <a:fillRef idx="0">
+          <a:schemeClr val="accent1"/>
+        </a:fillRef>
+        <a:effectRef idx="1">
+          <a:schemeClr val="accent1"/>
+        </a:effectRef>
+        <a:fontRef idx="minor">
+          <a:schemeClr val="tx1"/>
+        </a:fontRef>
+      </a:style>
+    </a:lnDef>
+  </a:objectDefaults>
+  <a:extraClrSchemeLst/>
+</a:theme>
 </file>
--- a/chapter1/clips/clip-05-exploring-a-dataset/clip.pptx
+++ b/chapter1/clips/clip-05-exploring-a-dataset/clip.pptx
@@ -6,12 +6,14 @@
   </p:sldMasterIdLst>
   <p:sldIdLst>
     <p:sldId id="256" r:id="rId7"/>
-    <p:sldId id="257" r:id="rId8"/>
-    <p:sldId id="258" r:id="rId9"/>
-    <p:sldId id="259" r:id="rId10"/>
-    <p:sldId id="260" r:id="rId11"/>
-    <p:sldId id="261" r:id="rId12"/>
+    <p:sldId id="257" r:id="rId9"/>
+    <p:sldId id="258" r:id="rId10"/>
+    <p:sldId id="259" r:id="rId11"/>
+    <p:sldId id="260" r:id="rId12"/>
+    <p:sldId id="261" r:id="rId13"/>
     <p:sldId id="262" r:id="rId14"/>
+    <p:sldId id="263" r:id="rId15"/>
+    <p:sldId id="264" r:id="rId16"/>
   </p:sldIdLst>
   <p:sldSz cx="12191695" cy="6858000" type="screen4x3"/>
   <p:notesSz cx="6858000" cy="9144000"/>
@@ -508,17 +510,497 @@
           <a:lstStyle/>
           <a:p>
             <a:r>
-              <a:t>Setting: compact income table + pandas profiling</a:t>
-            </a:r>
-          </a:p>
-          <a:p>
-            <a:r>
-              <a:t>Key idea: summaries, distribution checks, missingness</a:t>
-            </a:r>
-          </a:p>
-          <a:p>
-            <a:r>
-              <a:t>Adapt the script to any new CSV</a:t>
+              <a:t>Quality criteria tell you what good looks like. Exploration is how you check whether a concrete file meets that bar before fitting models.</a:t>
+            </a:r>
+          </a:p>
+        </p:txBody>
+      </p:sp>
+      <p:sp>
+        <p:nvSpPr>
+          <p:cNvPr id="4" name="Slide Number Placeholder 3"/>
+          <p:cNvSpPr>
+            <a:spLocks noGrp="1"/>
+          </p:cNvSpPr>
+          <p:nvPr>
+            <p:ph type="sldNum" idx="5" sz="quarter"/>
+          </p:nvPr>
+        </p:nvSpPr>
+        <p:spPr/>
+      </p:sp>
+    </p:spTree>
+  </p:cSld>
+  <p:clrMapOvr>
+    <a:masterClrMapping/>
+  </p:clrMapOvr>
+</p:notes>
+</file>
+
+<file path=ppt/notesSlides/notesSlide2.xml><?xml version="1.0" encoding="utf-8"?>
+<p:notes xmlns:a="http://schemas.openxmlformats.org/drawingml/2006/main" xmlns:p="http://schemas.openxmlformats.org/presentationml/2006/main" xmlns:r="http://schemas.openxmlformats.org/officeDocument/2006/relationships">
+  <p:cSld>
+    <p:spTree>
+      <p:nvGrpSpPr>
+        <p:cNvPr id="1" name=""/>
+        <p:cNvGrpSpPr/>
+        <p:nvPr/>
+      </p:nvGrpSpPr>
+      <p:grpSpPr>
+        <a:xfrm>
+          <a:off x="0" y="0"/>
+          <a:ext cx="0" cy="0"/>
+          <a:chOff x="0" y="0"/>
+          <a:chExt cx="0" cy="0"/>
+        </a:xfrm>
+      </p:grpSpPr>
+      <p:sp>
+        <p:nvSpPr>
+          <p:cNvPr id="2" name="Slide Image Placeholder 1"/>
+          <p:cNvSpPr>
+            <a:spLocks noGrp="1"/>
+          </p:cNvSpPr>
+          <p:nvPr>
+            <p:ph type="sldImg" idx="2"/>
+          </p:nvPr>
+        </p:nvSpPr>
+        <p:spPr/>
+      </p:sp>
+      <p:sp>
+        <p:nvSpPr>
+          <p:cNvPr id="3" name="Notes Placeholder 2"/>
+          <p:cNvSpPr>
+            <a:spLocks noGrp="1"/>
+          </p:cNvSpPr>
+          <p:nvPr>
+            <p:ph type="body" idx="3" sz="quarter"/>
+          </p:nvPr>
+        </p:nvSpPr>
+        <p:spPr/>
+        <p:txBody>
+          <a:bodyPr/>
+          <a:lstStyle/>
+          <a:p>
+            <a:r>
+              <a:t>This clip covers three early questions every analyst should settle, how to match tools to the table at hand, and a minimal profiling pattern using summaries, visuals, and missingness checks.</a:t>
+            </a:r>
+          </a:p>
+        </p:txBody>
+      </p:sp>
+      <p:sp>
+        <p:nvSpPr>
+          <p:cNvPr id="4" name="Slide Number Placeholder 3"/>
+          <p:cNvSpPr>
+            <a:spLocks noGrp="1"/>
+          </p:cNvSpPr>
+          <p:nvPr>
+            <p:ph type="sldNum" idx="5" sz="quarter"/>
+          </p:nvPr>
+        </p:nvSpPr>
+        <p:spPr/>
+      </p:sp>
+    </p:spTree>
+  </p:cSld>
+  <p:clrMapOvr>
+    <a:masterClrMapping/>
+  </p:clrMapOvr>
+</p:notes>
+</file>
+
+<file path=ppt/notesSlides/notesSlide3.xml><?xml version="1.0" encoding="utf-8"?>
+<p:notes xmlns:a="http://schemas.openxmlformats.org/drawingml/2006/main" xmlns:p="http://schemas.openxmlformats.org/presentationml/2006/main" xmlns:r="http://schemas.openxmlformats.org/officeDocument/2006/relationships">
+  <p:cSld>
+    <p:spTree>
+      <p:nvGrpSpPr>
+        <p:cNvPr id="1" name=""/>
+        <p:cNvGrpSpPr/>
+        <p:nvPr/>
+      </p:nvGrpSpPr>
+      <p:grpSpPr>
+        <a:xfrm>
+          <a:off x="0" y="0"/>
+          <a:ext cx="0" cy="0"/>
+          <a:chOff x="0" y="0"/>
+          <a:chExt cx="0" cy="0"/>
+        </a:xfrm>
+      </p:grpSpPr>
+      <p:sp>
+        <p:nvSpPr>
+          <p:cNvPr id="2" name="Slide Image Placeholder 1"/>
+          <p:cNvSpPr>
+            <a:spLocks noGrp="1"/>
+          </p:cNvSpPr>
+          <p:nvPr>
+            <p:ph type="sldImg" idx="2"/>
+          </p:nvPr>
+        </p:nvSpPr>
+        <p:spPr/>
+      </p:sp>
+      <p:sp>
+        <p:nvSpPr>
+          <p:cNvPr id="3" name="Notes Placeholder 2"/>
+          <p:cNvSpPr>
+            <a:spLocks noGrp="1"/>
+          </p:cNvSpPr>
+          <p:nvPr>
+            <p:ph type="body" idx="3" sz="quarter"/>
+          </p:nvPr>
+        </p:nvSpPr>
+        <p:spPr/>
+        <p:txBody>
+          <a:bodyPr/>
+          <a:lstStyle/>
+          <a:p>
+            <a:r>
+              <a:t>Exploration builds a mental model of the domain: seasonal sales cycles, sensor outliers, missing demographics that would bias a segmentation model. It does not replace formal cleaning in later chapters; it reveals where cleaning is needed and which variables merit deeper study.</a:t>
+            </a:r>
+          </a:p>
+        </p:txBody>
+      </p:sp>
+      <p:sp>
+        <p:nvSpPr>
+          <p:cNvPr id="4" name="Slide Number Placeholder 3"/>
+          <p:cNvSpPr>
+            <a:spLocks noGrp="1"/>
+          </p:cNvSpPr>
+          <p:nvPr>
+            <p:ph type="sldNum" idx="5" sz="quarter"/>
+          </p:nvPr>
+        </p:nvSpPr>
+        <p:spPr/>
+      </p:sp>
+    </p:spTree>
+  </p:cSld>
+  <p:clrMapOvr>
+    <a:masterClrMapping/>
+  </p:clrMapOvr>
+</p:notes>
+</file>
+
+<file path=ppt/notesSlides/notesSlide4.xml><?xml version="1.0" encoding="utf-8"?>
+<p:notes xmlns:a="http://schemas.openxmlformats.org/drawingml/2006/main" xmlns:p="http://schemas.openxmlformats.org/presentationml/2006/main" xmlns:r="http://schemas.openxmlformats.org/officeDocument/2006/relationships">
+  <p:cSld>
+    <p:spTree>
+      <p:nvGrpSpPr>
+        <p:cNvPr id="1" name=""/>
+        <p:cNvGrpSpPr/>
+        <p:nvPr/>
+      </p:nvGrpSpPr>
+      <p:grpSpPr>
+        <a:xfrm>
+          <a:off x="0" y="0"/>
+          <a:ext cx="0" cy="0"/>
+          <a:chOff x="0" y="0"/>
+          <a:chExt cx="0" cy="0"/>
+        </a:xfrm>
+      </p:grpSpPr>
+      <p:sp>
+        <p:nvSpPr>
+          <p:cNvPr id="2" name="Slide Image Placeholder 1"/>
+          <p:cNvSpPr>
+            <a:spLocks noGrp="1"/>
+          </p:cNvSpPr>
+          <p:nvPr>
+            <p:ph type="sldImg" idx="2"/>
+          </p:nvPr>
+        </p:nvSpPr>
+        <p:spPr/>
+      </p:sp>
+      <p:sp>
+        <p:nvSpPr>
+          <p:cNvPr id="3" name="Notes Placeholder 2"/>
+          <p:cNvSpPr>
+            <a:spLocks noGrp="1"/>
+          </p:cNvSpPr>
+          <p:nvPr>
+            <p:ph type="body" idx="3" sz="quarter"/>
+          </p:nvPr>
+        </p:nvSpPr>
+        <p:spPr/>
+        <p:txBody>
+          <a:bodyPr/>
+          <a:lstStyle/>
+          <a:p>
+            <a:r>
+              <a:t>Ask: what is in the table, what looks suspicious, and what analysis goals remain feasible given the defects you find. An e-commerce glance that reveals holiday spikes, for example, can justify seasonal features long before training.</a:t>
+            </a:r>
+          </a:p>
+        </p:txBody>
+      </p:sp>
+      <p:sp>
+        <p:nvSpPr>
+          <p:cNvPr id="4" name="Slide Number Placeholder 3"/>
+          <p:cNvSpPr>
+            <a:spLocks noGrp="1"/>
+          </p:cNvSpPr>
+          <p:nvPr>
+            <p:ph type="sldNum" idx="5" sz="quarter"/>
+          </p:nvPr>
+        </p:nvSpPr>
+        <p:spPr/>
+      </p:sp>
+    </p:spTree>
+  </p:cSld>
+  <p:clrMapOvr>
+    <a:masterClrMapping/>
+  </p:clrMapOvr>
+</p:notes>
+</file>
+
+<file path=ppt/notesSlides/notesSlide5.xml><?xml version="1.0" encoding="utf-8"?>
+<p:notes xmlns:a="http://schemas.openxmlformats.org/drawingml/2006/main" xmlns:p="http://schemas.openxmlformats.org/presentationml/2006/main" xmlns:r="http://schemas.openxmlformats.org/officeDocument/2006/relationships">
+  <p:cSld>
+    <p:spTree>
+      <p:nvGrpSpPr>
+        <p:cNvPr id="1" name=""/>
+        <p:cNvGrpSpPr/>
+        <p:nvPr/>
+      </p:nvGrpSpPr>
+      <p:grpSpPr>
+        <a:xfrm>
+          <a:off x="0" y="0"/>
+          <a:ext cx="0" cy="0"/>
+          <a:chOff x="0" y="0"/>
+          <a:chExt cx="0" cy="0"/>
+        </a:xfrm>
+      </p:grpSpPr>
+      <p:sp>
+        <p:nvSpPr>
+          <p:cNvPr id="2" name="Slide Image Placeholder 1"/>
+          <p:cNvSpPr>
+            <a:spLocks noGrp="1"/>
+          </p:cNvSpPr>
+          <p:nvPr>
+            <p:ph type="sldImg" idx="2"/>
+          </p:nvPr>
+        </p:nvSpPr>
+        <p:spPr/>
+      </p:sp>
+      <p:sp>
+        <p:nvSpPr>
+          <p:cNvPr id="3" name="Notes Placeholder 2"/>
+          <p:cNvSpPr>
+            <a:spLocks noGrp="1"/>
+          </p:cNvSpPr>
+          <p:nvPr>
+            <p:ph type="body" idx="3" sz="quarter"/>
+          </p:nvPr>
+        </p:nvSpPr>
+        <p:spPr/>
+        <p:txBody>
+          <a:bodyPr/>
+          <a:lstStyle/>
+          <a:p>
+            <a:r>
+              <a:t>Spreadsheets suit small tables. SQL handles filtering and aggregation in relational stores. pandas supports reproducible profiling. Dashboards help teams share interactive views. No single tool wins every scenario—the habit of documenting findings matters more than the brand of software.</a:t>
+            </a:r>
+          </a:p>
+        </p:txBody>
+      </p:sp>
+      <p:sp>
+        <p:nvSpPr>
+          <p:cNvPr id="4" name="Slide Number Placeholder 3"/>
+          <p:cNvSpPr>
+            <a:spLocks noGrp="1"/>
+          </p:cNvSpPr>
+          <p:nvPr>
+            <p:ph type="sldNum" idx="5" sz="quarter"/>
+          </p:nvPr>
+        </p:nvSpPr>
+        <p:spPr/>
+      </p:sp>
+    </p:spTree>
+  </p:cSld>
+  <p:clrMapOvr>
+    <a:masterClrMapping/>
+  </p:clrMapOvr>
+</p:notes>
+</file>
+
+<file path=ppt/notesSlides/notesSlide6.xml><?xml version="1.0" encoding="utf-8"?>
+<p:notes xmlns:a="http://schemas.openxmlformats.org/drawingml/2006/main" xmlns:p="http://schemas.openxmlformats.org/presentationml/2006/main" xmlns:r="http://schemas.openxmlformats.org/officeDocument/2006/relationships">
+  <p:cSld>
+    <p:spTree>
+      <p:nvGrpSpPr>
+        <p:cNvPr id="1" name=""/>
+        <p:cNvGrpSpPr/>
+        <p:nvPr/>
+      </p:nvGrpSpPr>
+      <p:grpSpPr>
+        <a:xfrm>
+          <a:off x="0" y="0"/>
+          <a:ext cx="0" cy="0"/>
+          <a:chOff x="0" y="0"/>
+          <a:chExt cx="0" cy="0"/>
+        </a:xfrm>
+      </p:grpSpPr>
+      <p:sp>
+        <p:nvSpPr>
+          <p:cNvPr id="2" name="Slide Image Placeholder 1"/>
+          <p:cNvSpPr>
+            <a:spLocks noGrp="1"/>
+          </p:cNvSpPr>
+          <p:nvPr>
+            <p:ph type="sldImg" idx="2"/>
+          </p:nvPr>
+        </p:nvSpPr>
+        <p:spPr/>
+      </p:sp>
+      <p:sp>
+        <p:nvSpPr>
+          <p:cNvPr id="3" name="Notes Placeholder 2"/>
+          <p:cNvSpPr>
+            <a:spLocks noGrp="1"/>
+          </p:cNvSpPr>
+          <p:nvPr>
+            <p:ph type="body" idx="3" sz="quarter"/>
+          </p:nvPr>
+        </p:nvSpPr>
+        <p:spPr/>
+        <p:txBody>
+          <a:bodyPr/>
+          <a:lstStyle/>
+          <a:p>
+            <a:r>
+              <a:t>Example 1.20 walks through a standard pandas profiling script on a compact household-income table. Use it as a template: summary statistics, distribution checks, and null counts. Run the example 20 module to see the pattern end to end.</a:t>
+            </a:r>
+          </a:p>
+        </p:txBody>
+      </p:sp>
+      <p:sp>
+        <p:nvSpPr>
+          <p:cNvPr id="4" name="Slide Number Placeholder 3"/>
+          <p:cNvSpPr>
+            <a:spLocks noGrp="1"/>
+          </p:cNvSpPr>
+          <p:nvPr>
+            <p:ph type="sldNum" idx="5" sz="quarter"/>
+          </p:nvPr>
+        </p:nvSpPr>
+        <p:spPr/>
+      </p:sp>
+    </p:spTree>
+  </p:cSld>
+  <p:clrMapOvr>
+    <a:masterClrMapping/>
+  </p:clrMapOvr>
+</p:notes>
+</file>
+
+<file path=ppt/notesSlides/notesSlide7.xml><?xml version="1.0" encoding="utf-8"?>
+<p:notes xmlns:a="http://schemas.openxmlformats.org/drawingml/2006/main" xmlns:p="http://schemas.openxmlformats.org/presentationml/2006/main" xmlns:r="http://schemas.openxmlformats.org/officeDocument/2006/relationships">
+  <p:cSld>
+    <p:spTree>
+      <p:nvGrpSpPr>
+        <p:cNvPr id="1" name=""/>
+        <p:cNvGrpSpPr/>
+        <p:nvPr/>
+      </p:nvGrpSpPr>
+      <p:grpSpPr>
+        <a:xfrm>
+          <a:off x="0" y="0"/>
+          <a:ext cx="0" cy="0"/>
+          <a:chOff x="0" y="0"/>
+          <a:chExt cx="0" cy="0"/>
+        </a:xfrm>
+      </p:grpSpPr>
+      <p:sp>
+        <p:nvSpPr>
+          <p:cNvPr id="2" name="Slide Image Placeholder 1"/>
+          <p:cNvSpPr>
+            <a:spLocks noGrp="1"/>
+          </p:cNvSpPr>
+          <p:nvPr>
+            <p:ph type="sldImg" idx="2"/>
+          </p:nvPr>
+        </p:nvSpPr>
+        <p:spPr/>
+      </p:sp>
+      <p:sp>
+        <p:nvSpPr>
+          <p:cNvPr id="3" name="Notes Placeholder 2"/>
+          <p:cNvSpPr>
+            <a:spLocks noGrp="1"/>
+          </p:cNvSpPr>
+          <p:nvPr>
+            <p:ph type="body" idx="3" sz="quarter"/>
+          </p:nvPr>
+        </p:nvSpPr>
+        <p:spPr/>
+        <p:txBody>
+          <a:bodyPr/>
+          <a:lstStyle/>
+          <a:p>
+            <a:r>
+              <a:t>Explore before modeling. Choose tools that fit size and structure. Document what you inspected and what you decided to fix so later analysis stays accountable.</a:t>
+            </a:r>
+          </a:p>
+        </p:txBody>
+      </p:sp>
+      <p:sp>
+        <p:nvSpPr>
+          <p:cNvPr id="4" name="Slide Number Placeholder 3"/>
+          <p:cNvSpPr>
+            <a:spLocks noGrp="1"/>
+          </p:cNvSpPr>
+          <p:nvPr>
+            <p:ph type="sldNum" idx="5" sz="quarter"/>
+          </p:nvPr>
+        </p:nvSpPr>
+        <p:spPr/>
+      </p:sp>
+    </p:spTree>
+  </p:cSld>
+  <p:clrMapOvr>
+    <a:masterClrMapping/>
+  </p:clrMapOvr>
+</p:notes>
+</file>
+
+<file path=ppt/notesSlides/notesSlide8.xml><?xml version="1.0" encoding="utf-8"?>
+<p:notes xmlns:a="http://schemas.openxmlformats.org/drawingml/2006/main" xmlns:p="http://schemas.openxmlformats.org/presentationml/2006/main" xmlns:r="http://schemas.openxmlformats.org/officeDocument/2006/relationships">
+  <p:cSld>
+    <p:spTree>
+      <p:nvGrpSpPr>
+        <p:cNvPr id="1" name=""/>
+        <p:cNvGrpSpPr/>
+        <p:nvPr/>
+      </p:nvGrpSpPr>
+      <p:grpSpPr>
+        <a:xfrm>
+          <a:off x="0" y="0"/>
+          <a:ext cx="0" cy="0"/>
+          <a:chOff x="0" y="0"/>
+          <a:chExt cx="0" cy="0"/>
+        </a:xfrm>
+      </p:grpSpPr>
+      <p:sp>
+        <p:nvSpPr>
+          <p:cNvPr id="2" name="Slide Image Placeholder 1"/>
+          <p:cNvSpPr>
+            <a:spLocks noGrp="1"/>
+          </p:cNvSpPr>
+          <p:nvPr>
+            <p:ph type="sldImg" idx="2"/>
+          </p:nvPr>
+        </p:nvSpPr>
+        <p:spPr/>
+      </p:sp>
+      <p:sp>
+        <p:nvSpPr>
+          <p:cNvPr id="3" name="Notes Placeholder 2"/>
+          <p:cNvSpPr>
+            <a:spLocks noGrp="1"/>
+          </p:cNvSpPr>
+          <p:nvPr>
+            <p:ph type="body" idx="3" sz="quarter"/>
+          </p:nvPr>
+        </p:nvSpPr>
+        <p:spPr/>
+        <p:txBody>
+          <a:bodyPr/>
+          <a:lstStyle/>
+          <a:p>
+            <a:r>
+              <a:t>Complete the quiz, then continue to uses of datasets—where these practices create value across sectors.</a:t>
             </a:r>
           </a:p>
         </p:txBody>
@@ -3580,7 +4062,7 @@
                 </a:solidFill>
                 <a:latin typeface="Calibri"/>
               </a:rPr>
-              <a:t>Discover whether a concrete file meets the quality bar</a:t>
+              <a:t>Quality criteria tell you what good looks like</a:t>
             </a:r>
           </a:p>
         </p:txBody>
@@ -3619,7 +4101,7 @@
               </a:defRPr>
             </a:pPr>
             <a:r>
-              <a:t>Chapter 1 — Exploring A Dataset</a:t>
+              <a:t>Chapter 1 — 05 Exploring A Dataset</a:t>
             </a:r>
           </a:p>
         </p:txBody>
@@ -3704,12 +4186,13 @@
           <a:lstStyle/>
           <a:p>
             <a:pPr>
+              <a:spcAft>
+                <a:spcPts val="1000"/>
+              </a:spcAft>
+              <a:buChar char="•"/>
               <a:lnSpc>
                 <a:spcPts val="2200"/>
               </a:lnSpc>
-              <a:spcAft>
-                <a:spcPts val="1000"/>
-              </a:spcAft>
             </a:pPr>
             <a:r>
               <a:rPr sz="2000" b="0">
@@ -3718,83 +4201,7 @@
                 </a:solidFill>
                 <a:latin typeface="Calibri"/>
               </a:rPr>
-              <a:t>• State three early questions exploration should</a:t>
-            </a:r>
-          </a:p>
-          <a:p>
-            <a:pPr>
-              <a:lnSpc>
-                <a:spcPts val="2200"/>
-              </a:lnSpc>
-              <a:spcAft>
-                <a:spcPts val="1000"/>
-              </a:spcAft>
-            </a:pPr>
-            <a:r>
-              <a:rPr sz="2000" b="0">
-                <a:solidFill>
-                  <a:srgbClr val="333333"/>
-                </a:solidFill>
-                <a:latin typeface="Calibri"/>
-              </a:rPr>
-              <a:t>      answer</a:t>
-            </a:r>
-          </a:p>
-          <a:p>
-            <a:pPr>
-              <a:lnSpc>
-                <a:spcPts val="2200"/>
-              </a:lnSpc>
-              <a:spcAft>
-                <a:spcPts val="1000"/>
-              </a:spcAft>
-            </a:pPr>
-            <a:r>
-              <a:rPr sz="2000" b="0">
-                <a:solidFill>
-                  <a:srgbClr val="333333"/>
-                </a:solidFill>
-                <a:latin typeface="Calibri"/>
-              </a:rPr>
-              <a:t>• Match common tools to dataset size and structure</a:t>
-            </a:r>
-          </a:p>
-          <a:p>
-            <a:pPr>
-              <a:lnSpc>
-                <a:spcPts val="2200"/>
-              </a:lnSpc>
-              <a:spcAft>
-                <a:spcPts val="1000"/>
-              </a:spcAft>
-            </a:pPr>
-            <a:r>
-              <a:rPr sz="2000" b="0">
-                <a:solidFill>
-                  <a:srgbClr val="333333"/>
-                </a:solidFill>
-                <a:latin typeface="Calibri"/>
-              </a:rPr>
-              <a:t>• Outline a first-pass profiling pattern (summaries +</a:t>
-            </a:r>
-          </a:p>
-          <a:p>
-            <a:pPr>
-              <a:lnSpc>
-                <a:spcPts val="2200"/>
-              </a:lnSpc>
-              <a:spcAft>
-                <a:spcPts val="1000"/>
-              </a:spcAft>
-            </a:pPr>
-            <a:r>
-              <a:rPr sz="2000" b="0">
-                <a:solidFill>
-                  <a:srgbClr val="333333"/>
-                </a:solidFill>
-                <a:latin typeface="Calibri"/>
-              </a:rPr>
-              <a:t>      visuals + missingness)</a:t>
+              <a:t>A minimal profiling pattern using summaries, visuals, and missingness checks</a:t>
             </a:r>
           </a:p>
         </p:txBody>
@@ -3833,7 +4240,7 @@
               </a:defRPr>
             </a:pPr>
             <a:r>
-              <a:t>Chapter 1 — Exploring A Dataset</a:t>
+              <a:t>Chapter 1 — 05 Exploring A Dataset</a:t>
             </a:r>
           </a:p>
         </p:txBody>
@@ -3918,31 +4325,33 @@
           <a:lstStyle/>
           <a:p>
             <a:pPr>
+              <a:spcAft>
+                <a:spcPts val="1000"/>
+              </a:spcAft>
+              <a:buChar char="•"/>
               <a:lnSpc>
                 <a:spcPts val="2200"/>
               </a:lnSpc>
+            </a:pPr>
+            <a:r>
+              <a:rPr sz="2000" b="0">
+                <a:solidFill>
+                  <a:srgbClr val="333333"/>
+                </a:solidFill>
+                <a:latin typeface="Calibri"/>
+              </a:rPr>
+              <a:t>Exploration builds a mental model of the domain</a:t>
+            </a:r>
+          </a:p>
+          <a:p>
+            <a:pPr>
               <a:spcAft>
                 <a:spcPts val="1000"/>
               </a:spcAft>
-            </a:pPr>
-            <a:r>
-              <a:rPr sz="2000" b="0">
-                <a:solidFill>
-                  <a:srgbClr val="333333"/>
-                </a:solidFill>
-                <a:latin typeface="Calibri"/>
-              </a:rPr>
-              <a:t>• Turns an unfamiliar file into a mental model</a:t>
-            </a:r>
-          </a:p>
-          <a:p>
-            <a:pPr>
+              <a:buChar char="•"/>
               <a:lnSpc>
                 <a:spcPts val="2200"/>
               </a:lnSpc>
-              <a:spcAft>
-                <a:spcPts val="1000"/>
-              </a:spcAft>
             </a:pPr>
             <a:r>
               <a:rPr sz="2000" b="0">
@@ -3951,64 +4360,7 @@
                 </a:solidFill>
                 <a:latin typeface="Calibri"/>
               </a:rPr>
-              <a:t>• Surfaces seasonal patterns, outliers, missing fields</a:t>
-            </a:r>
-          </a:p>
-          <a:p>
-            <a:pPr>
-              <a:lnSpc>
-                <a:spcPts val="2200"/>
-              </a:lnSpc>
-              <a:spcAft>
-                <a:spcPts val="1000"/>
-              </a:spcAft>
-            </a:pPr>
-            <a:r>
-              <a:rPr sz="2000" b="0">
-                <a:solidFill>
-                  <a:srgbClr val="333333"/>
-                </a:solidFill>
-                <a:latin typeface="Calibri"/>
-              </a:rPr>
-              <a:t>• Shapes which quality issues to prioritize</a:t>
-            </a:r>
-          </a:p>
-          <a:p>
-            <a:pPr>
-              <a:lnSpc>
-                <a:spcPts val="2200"/>
-              </a:lnSpc>
-              <a:spcAft>
-                <a:spcPts val="1000"/>
-              </a:spcAft>
-            </a:pPr>
-            <a:r>
-              <a:rPr sz="2000" b="0">
-                <a:solidFill>
-                  <a:srgbClr val="333333"/>
-                </a:solidFill>
-                <a:latin typeface="Calibri"/>
-              </a:rPr>
-              <a:t>• Does not replace formal cleaning—reveals where it is</a:t>
-            </a:r>
-          </a:p>
-          <a:p>
-            <a:pPr>
-              <a:lnSpc>
-                <a:spcPts val="2200"/>
-              </a:lnSpc>
-              <a:spcAft>
-                <a:spcPts val="1000"/>
-              </a:spcAft>
-            </a:pPr>
-            <a:r>
-              <a:rPr sz="2000" b="0">
-                <a:solidFill>
-                  <a:srgbClr val="333333"/>
-                </a:solidFill>
-                <a:latin typeface="Calibri"/>
-              </a:rPr>
-              <a:t>      needed</a:t>
+              <a:t>It does not replace formal cleaning in later chapters</a:t>
             </a:r>
           </a:p>
         </p:txBody>
@@ -4047,7 +4399,7 @@
               </a:defRPr>
             </a:pPr>
             <a:r>
-              <a:t>Chapter 1 — Exploring A Dataset</a:t>
+              <a:t>Chapter 1 — 05 Exploring A Dataset</a:t>
             </a:r>
           </a:p>
         </p:txBody>
@@ -4132,31 +4484,33 @@
           <a:lstStyle/>
           <a:p>
             <a:pPr>
+              <a:spcAft>
+                <a:spcPts val="1000"/>
+              </a:spcAft>
+              <a:buChar char="•"/>
               <a:lnSpc>
                 <a:spcPts val="2200"/>
               </a:lnSpc>
+            </a:pPr>
+            <a:r>
+              <a:rPr sz="2000" b="0">
+                <a:solidFill>
+                  <a:srgbClr val="333333"/>
+                </a:solidFill>
+                <a:latin typeface="Calibri"/>
+              </a:rPr>
+              <a:t>Ask: what is in the table, what looks suspicious</a:t>
+            </a:r>
+          </a:p>
+          <a:p>
+            <a:pPr>
               <a:spcAft>
                 <a:spcPts val="1000"/>
               </a:spcAft>
-            </a:pPr>
-            <a:r>
-              <a:rPr sz="2000" b="0">
-                <a:solidFill>
-                  <a:srgbClr val="333333"/>
-                </a:solidFill>
-                <a:latin typeface="Calibri"/>
-              </a:rPr>
-              <a:t>• What is in the table?</a:t>
-            </a:r>
-          </a:p>
-          <a:p>
-            <a:pPr>
+              <a:buChar char="•"/>
               <a:lnSpc>
                 <a:spcPts val="2200"/>
               </a:lnSpc>
-              <a:spcAft>
-                <a:spcPts val="1000"/>
-              </a:spcAft>
             </a:pPr>
             <a:r>
               <a:rPr sz="2000" b="0">
@@ -4165,26 +4519,7 @@
                 </a:solidFill>
                 <a:latin typeface="Calibri"/>
               </a:rPr>
-              <a:t>• What looks suspicious?</a:t>
-            </a:r>
-          </a:p>
-          <a:p>
-            <a:pPr>
-              <a:lnSpc>
-                <a:spcPts val="2200"/>
-              </a:lnSpc>
-              <a:spcAft>
-                <a:spcPts val="1000"/>
-              </a:spcAft>
-            </a:pPr>
-            <a:r>
-              <a:rPr sz="2000" b="0">
-                <a:solidFill>
-                  <a:srgbClr val="333333"/>
-                </a:solidFill>
-                <a:latin typeface="Calibri"/>
-              </a:rPr>
-              <a:t>• What analysis goals remain feasible given defects?</a:t>
+              <a:t>An e-commerce glance that reveals holiday spikes</a:t>
             </a:r>
           </a:p>
         </p:txBody>
@@ -4223,7 +4558,7 @@
               </a:defRPr>
             </a:pPr>
             <a:r>
-              <a:t>Chapter 1 — Exploring A Dataset</a:t>
+              <a:t>Chapter 1 — 05 Exploring A Dataset</a:t>
             </a:r>
           </a:p>
         </p:txBody>
@@ -4308,69 +4643,93 @@
           <a:lstStyle/>
           <a:p>
             <a:pPr>
+              <a:spcAft>
+                <a:spcPts val="1000"/>
+              </a:spcAft>
+              <a:buChar char="•"/>
               <a:lnSpc>
                 <a:spcPts val="2200"/>
               </a:lnSpc>
+            </a:pPr>
+            <a:r>
+              <a:rPr sz="2000" b="0">
+                <a:solidFill>
+                  <a:srgbClr val="333333"/>
+                </a:solidFill>
+                <a:latin typeface="Calibri"/>
+              </a:rPr>
+              <a:t>Spreadsheets suit small tables</a:t>
+            </a:r>
+          </a:p>
+          <a:p>
+            <a:pPr>
               <a:spcAft>
                 <a:spcPts val="1000"/>
               </a:spcAft>
-            </a:pPr>
-            <a:r>
-              <a:rPr sz="2000" b="0">
-                <a:solidFill>
-                  <a:srgbClr val="333333"/>
-                </a:solidFill>
-                <a:latin typeface="Calibri"/>
-              </a:rPr>
-              <a:t>• Spreadsheets — small tables, quick looks</a:t>
-            </a:r>
-          </a:p>
-          <a:p>
-            <a:pPr>
+              <a:buChar char="•"/>
               <a:lnSpc>
                 <a:spcPts val="2200"/>
               </a:lnSpc>
+            </a:pPr>
+            <a:r>
+              <a:rPr sz="2000" b="0">
+                <a:solidFill>
+                  <a:srgbClr val="333333"/>
+                </a:solidFill>
+                <a:latin typeface="Calibri"/>
+              </a:rPr>
+              <a:t>SQL handles filtering and aggregation in relational stores</a:t>
+            </a:r>
+          </a:p>
+          <a:p>
+            <a:pPr>
               <a:spcAft>
                 <a:spcPts val="1000"/>
               </a:spcAft>
-            </a:pPr>
-            <a:r>
-              <a:rPr sz="2000" b="0">
-                <a:solidFill>
-                  <a:srgbClr val="333333"/>
-                </a:solidFill>
-                <a:latin typeface="Calibri"/>
-              </a:rPr>
-              <a:t>• SQL — filter and aggregate relational stores</a:t>
-            </a:r>
-          </a:p>
-          <a:p>
-            <a:pPr>
+              <a:buChar char="•"/>
               <a:lnSpc>
                 <a:spcPts val="2200"/>
               </a:lnSpc>
+            </a:pPr>
+            <a:r>
+              <a:rPr sz="2000" b="0">
+                <a:solidFill>
+                  <a:srgbClr val="333333"/>
+                </a:solidFill>
+                <a:latin typeface="Calibri"/>
+              </a:rPr>
+              <a:t>Pandas supports reproducible profiling</a:t>
+            </a:r>
+          </a:p>
+          <a:p>
+            <a:pPr>
               <a:spcAft>
                 <a:spcPts val="1000"/>
               </a:spcAft>
-            </a:pPr>
-            <a:r>
-              <a:rPr sz="2000" b="0">
-                <a:solidFill>
-                  <a:srgbClr val="333333"/>
-                </a:solidFill>
-                <a:latin typeface="Calibri"/>
-              </a:rPr>
-              <a:t>• pandas — reproducible profiling scripts</a:t>
-            </a:r>
-          </a:p>
-          <a:p>
-            <a:pPr>
+              <a:buChar char="•"/>
               <a:lnSpc>
                 <a:spcPts val="2200"/>
               </a:lnSpc>
+            </a:pPr>
+            <a:r>
+              <a:rPr sz="2000" b="0">
+                <a:solidFill>
+                  <a:srgbClr val="333333"/>
+                </a:solidFill>
+                <a:latin typeface="Calibri"/>
+              </a:rPr>
+              <a:t>Dashboards help teams share interactive views</a:t>
+            </a:r>
+          </a:p>
+          <a:p>
+            <a:pPr>
               <a:spcAft>
                 <a:spcPts val="1000"/>
               </a:spcAft>
+              <a:buChar char="•"/>
+              <a:lnSpc>
+                <a:spcPts val="2200"/>
+              </a:lnSpc>
             </a:pPr>
             <a:r>
               <a:rPr sz="2000" b="0">
@@ -4379,7 +4738,7 @@
                 </a:solidFill>
                 <a:latin typeface="Calibri"/>
               </a:rPr>
-              <a:t>• Tableau / Power BI — shared interactive views</a:t>
+              <a:t>No single tool wins every scenario</a:t>
             </a:r>
           </a:p>
         </p:txBody>
@@ -4418,7 +4777,7 @@
               </a:defRPr>
             </a:pPr>
             <a:r>
-              <a:t>Chapter 1 — Exploring A Dataset</a:t>
+              <a:t>Chapter 1 — 05 Exploring A Dataset</a:t>
             </a:r>
           </a:p>
         </p:txBody>
@@ -4488,15 +4847,13 @@
         </p:nvSpPr>
         <p:spPr>
           <a:xfrm>
-            <a:off x="548640" y="1051560"/>
-            <a:ext cx="11064240" cy="914400"/>
+            <a:off x="548640" y="1234440"/>
+            <a:ext cx="11064240" cy="4937760"/>
           </a:xfrm>
           <a:prstGeom prst="rect">
             <a:avLst/>
           </a:prstGeom>
-          <a:solidFill>
-            <a:srgbClr val="F4F4F4"/>
-          </a:solidFill>
+          <a:noFill/>
         </p:spPr>
         <p:txBody>
           <a:bodyPr wrap="square">
@@ -4505,21 +4862,102 @@
           <a:lstStyle/>
           <a:p>
             <a:pPr>
+              <a:spcAft>
+                <a:spcPts val="1000"/>
+              </a:spcAft>
+              <a:buChar char="•"/>
               <a:lnSpc>
                 <a:spcPts val="2200"/>
               </a:lnSpc>
+            </a:pPr>
+            <a:r>
+              <a:rPr sz="2000" b="0">
+                <a:solidFill>
+                  <a:srgbClr val="333333"/>
+                </a:solidFill>
+                <a:latin typeface="Calibri"/>
+              </a:rPr>
+              <a:t>Example 1.20 — hands-on module</a:t>
+            </a:r>
+          </a:p>
+          <a:p>
+            <a:pPr>
               <a:spcAft>
-                <a:spcPts val="200"/>
+                <a:spcPts val="1000"/>
               </a:spcAft>
+              <a:buChar char="•"/>
+              <a:lnSpc>
+                <a:spcPts val="2200"/>
+              </a:lnSpc>
             </a:pPr>
             <a:r>
               <a:rPr sz="2000" b="0">
                 <a:solidFill>
                   <a:srgbClr val="333333"/>
                 </a:solidFill>
-                <a:latin typeface="Consolas"/>
+                <a:latin typeface="Calibri"/>
               </a:rPr>
-              <a:t>$ cd modules/chapter1/example20/ &amp;&amp; bash run.sh</a:t>
+              <a:t>Example 1.20 walks through a standard pandas profiling script on a compact</a:t>
+            </a:r>
+          </a:p>
+          <a:p>
+            <a:pPr>
+              <a:spcAft>
+                <a:spcPts val="1000"/>
+              </a:spcAft>
+              <a:buChar char="•"/>
+              <a:lnSpc>
+                <a:spcPts val="2200"/>
+              </a:lnSpc>
+            </a:pPr>
+            <a:r>
+              <a:rPr sz="2000" b="0">
+                <a:solidFill>
+                  <a:srgbClr val="333333"/>
+                </a:solidFill>
+                <a:latin typeface="Calibri"/>
+              </a:rPr>
+              <a:t>Use it as a template: summary statistics, distribution checks, and null counts</a:t>
+            </a:r>
+          </a:p>
+          <a:p>
+            <a:pPr>
+              <a:spcAft>
+                <a:spcPts val="1000"/>
+              </a:spcAft>
+              <a:buChar char="•"/>
+              <a:lnSpc>
+                <a:spcPts val="2200"/>
+              </a:lnSpc>
+            </a:pPr>
+            <a:r>
+              <a:rPr sz="2000" b="0">
+                <a:solidFill>
+                  <a:srgbClr val="333333"/>
+                </a:solidFill>
+                <a:latin typeface="Calibri"/>
+              </a:rPr>
+              <a:t>Explore the chapter example module</a:t>
+            </a:r>
+          </a:p>
+          <a:p>
+            <a:pPr>
+              <a:spcAft>
+                <a:spcPts val="1000"/>
+              </a:spcAft>
+              <a:buChar char="•"/>
+              <a:lnSpc>
+                <a:spcPts val="2200"/>
+              </a:lnSpc>
+            </a:pPr>
+            <a:r>
+              <a:rPr sz="2000" b="0">
+                <a:solidFill>
+                  <a:srgbClr val="333333"/>
+                </a:solidFill>
+                <a:latin typeface="Calibri"/>
+              </a:rPr>
+              <a:t>View files: `modules/chapter1/example20/`</a:t>
             </a:r>
           </a:p>
         </p:txBody>
@@ -4558,7 +4996,7 @@
               </a:defRPr>
             </a:pPr>
             <a:r>
-              <a:t>Chapter 1 — Exploring A Dataset</a:t>
+              <a:t>Chapter 1 — 05 Exploring A Dataset</a:t>
             </a:r>
           </a:p>
         </p:txBody>
@@ -4615,6 +5053,450 @@
                 </a:solidFill>
                 <a:latin typeface="Calibri"/>
               </a:rPr>
+              <a:t>Example 1.20 — listing</a:t>
+            </a:r>
+          </a:p>
+        </p:txBody>
+      </p:sp>
+      <p:sp>
+        <p:nvSpPr>
+          <p:cNvPr id="3" name="TextBox 2"/>
+          <p:cNvSpPr txBox="1"/>
+          <p:nvPr/>
+        </p:nvSpPr>
+        <p:spPr>
+          <a:xfrm>
+            <a:off x="548640" y="1143000"/>
+            <a:ext cx="11064240" cy="5029200"/>
+          </a:xfrm>
+          <a:prstGeom prst="rect">
+            <a:avLst/>
+          </a:prstGeom>
+          <a:solidFill>
+            <a:srgbClr val="F4F4F4"/>
+          </a:solidFill>
+        </p:spPr>
+        <p:txBody>
+          <a:bodyPr wrap="square">
+            <a:noAutofit/>
+          </a:bodyPr>
+          <a:lstStyle/>
+          <a:p>
+            <a:pPr>
+              <a:lnSpc>
+                <a:spcPts val="2200"/>
+              </a:lnSpc>
+              <a:spcAft>
+                <a:spcPts val="400"/>
+              </a:spcAft>
+            </a:pPr>
+            <a:r>
+              <a:rPr sz="2000" b="0">
+                <a:solidFill>
+                  <a:srgbClr val="333333"/>
+                </a:solidFill>
+                <a:latin typeface="Consolas"/>
+              </a:rPr>
+              <a:t>import pandas as pd</a:t>
+            </a:r>
+          </a:p>
+          <a:p>
+            <a:pPr>
+              <a:lnSpc>
+                <a:spcPts val="2200"/>
+              </a:lnSpc>
+              <a:spcAft>
+                <a:spcPts val="400"/>
+              </a:spcAft>
+            </a:pPr>
+            <a:r>
+              <a:rPr sz="2000" b="0">
+                <a:solidFill>
+                  <a:srgbClr val="333333"/>
+                </a:solidFill>
+                <a:latin typeface="Consolas"/>
+              </a:rPr>
+              <a:t>import matplotlib.pyplot as plt</a:t>
+            </a:r>
+          </a:p>
+          <a:p>
+            <a:pPr>
+              <a:lnSpc>
+                <a:spcPts val="2200"/>
+              </a:lnSpc>
+              <a:spcAft>
+                <a:spcPts val="400"/>
+              </a:spcAft>
+            </a:pPr>
+            <a:r>
+              <a:rPr sz="2000" b="0">
+                <a:solidFill>
+                  <a:srgbClr val="333333"/>
+                </a:solidFill>
+                <a:latin typeface="Consolas"/>
+              </a:rPr>
+              <a:t/>
+            </a:r>
+          </a:p>
+          <a:p>
+            <a:pPr>
+              <a:lnSpc>
+                <a:spcPts val="2200"/>
+              </a:lnSpc>
+              <a:spcAft>
+                <a:spcPts val="400"/>
+              </a:spcAft>
+            </a:pPr>
+            <a:r>
+              <a:rPr sz="2000" b="0">
+                <a:solidFill>
+                  <a:srgbClr val="333333"/>
+                </a:solidFill>
+                <a:latin typeface="Consolas"/>
+              </a:rPr>
+              <a:t># Load the dataset</a:t>
+            </a:r>
+          </a:p>
+          <a:p>
+            <a:pPr>
+              <a:lnSpc>
+                <a:spcPts val="2200"/>
+              </a:lnSpc>
+              <a:spcAft>
+                <a:spcPts val="400"/>
+              </a:spcAft>
+            </a:pPr>
+            <a:r>
+              <a:rPr sz="2000" b="0">
+                <a:solidFill>
+                  <a:srgbClr val="333333"/>
+                </a:solidFill>
+                <a:latin typeface="Consolas"/>
+              </a:rPr>
+              <a:t>household_incomes = pd.read_csv("household_incomes.csv")</a:t>
+            </a:r>
+          </a:p>
+          <a:p>
+            <a:pPr>
+              <a:lnSpc>
+                <a:spcPts val="2200"/>
+              </a:lnSpc>
+              <a:spcAft>
+                <a:spcPts val="400"/>
+              </a:spcAft>
+            </a:pPr>
+            <a:r>
+              <a:rPr sz="2000" b="0">
+                <a:solidFill>
+                  <a:srgbClr val="333333"/>
+                </a:solidFill>
+                <a:latin typeface="Consolas"/>
+              </a:rPr>
+              <a:t/>
+            </a:r>
+          </a:p>
+          <a:p>
+            <a:pPr>
+              <a:lnSpc>
+                <a:spcPts val="2200"/>
+              </a:lnSpc>
+              <a:spcAft>
+                <a:spcPts val="400"/>
+              </a:spcAft>
+            </a:pPr>
+            <a:r>
+              <a:rPr sz="2000" b="0">
+                <a:solidFill>
+                  <a:srgbClr val="333333"/>
+                </a:solidFill>
+                <a:latin typeface="Consolas"/>
+              </a:rPr>
+              <a:t># View the first few rows</a:t>
+            </a:r>
+          </a:p>
+          <a:p>
+            <a:pPr>
+              <a:lnSpc>
+                <a:spcPts val="2200"/>
+              </a:lnSpc>
+              <a:spcAft>
+                <a:spcPts val="400"/>
+              </a:spcAft>
+            </a:pPr>
+            <a:r>
+              <a:rPr sz="2000" b="0">
+                <a:solidFill>
+                  <a:srgbClr val="333333"/>
+                </a:solidFill>
+                <a:latin typeface="Consolas"/>
+              </a:rPr>
+              <a:t>print(household_incomes.head())</a:t>
+            </a:r>
+          </a:p>
+          <a:p>
+            <a:pPr>
+              <a:lnSpc>
+                <a:spcPts val="2200"/>
+              </a:lnSpc>
+              <a:spcAft>
+                <a:spcPts val="400"/>
+              </a:spcAft>
+            </a:pPr>
+            <a:r>
+              <a:rPr sz="2000" b="0">
+                <a:solidFill>
+                  <a:srgbClr val="333333"/>
+                </a:solidFill>
+                <a:latin typeface="Consolas"/>
+              </a:rPr>
+              <a:t/>
+            </a:r>
+          </a:p>
+          <a:p>
+            <a:pPr>
+              <a:lnSpc>
+                <a:spcPts val="2200"/>
+              </a:lnSpc>
+              <a:spcAft>
+                <a:spcPts val="400"/>
+              </a:spcAft>
+            </a:pPr>
+            <a:r>
+              <a:rPr sz="2000" b="0">
+                <a:solidFill>
+                  <a:srgbClr val="333333"/>
+                </a:solidFill>
+                <a:latin typeface="Consolas"/>
+              </a:rPr>
+              <a:t># Summary statistics for numerical columns</a:t>
+            </a:r>
+          </a:p>
+          <a:p>
+            <a:pPr>
+              <a:lnSpc>
+                <a:spcPts val="2200"/>
+              </a:lnSpc>
+              <a:spcAft>
+                <a:spcPts val="400"/>
+              </a:spcAft>
+            </a:pPr>
+            <a:r>
+              <a:rPr sz="2000" b="0">
+                <a:solidFill>
+                  <a:srgbClr val="333333"/>
+                </a:solidFill>
+                <a:latin typeface="Consolas"/>
+              </a:rPr>
+              <a:t>print(household_incomes.describe())</a:t>
+            </a:r>
+          </a:p>
+          <a:p>
+            <a:pPr>
+              <a:lnSpc>
+                <a:spcPts val="2200"/>
+              </a:lnSpc>
+              <a:spcAft>
+                <a:spcPts val="400"/>
+              </a:spcAft>
+            </a:pPr>
+            <a:r>
+              <a:rPr sz="2000" b="0">
+                <a:solidFill>
+                  <a:srgbClr val="333333"/>
+                </a:solidFill>
+                <a:latin typeface="Consolas"/>
+              </a:rPr>
+              <a:t/>
+            </a:r>
+          </a:p>
+          <a:p>
+            <a:pPr>
+              <a:lnSpc>
+                <a:spcPts val="2200"/>
+              </a:lnSpc>
+              <a:spcAft>
+                <a:spcPts val="400"/>
+              </a:spcAft>
+            </a:pPr>
+            <a:r>
+              <a:rPr sz="2000" b="0">
+                <a:solidFill>
+                  <a:srgbClr val="333333"/>
+                </a:solidFill>
+                <a:latin typeface="Consolas"/>
+              </a:rPr>
+              <a:t># Check for missing values</a:t>
+            </a:r>
+          </a:p>
+          <a:p>
+            <a:pPr>
+              <a:lnSpc>
+                <a:spcPts val="2200"/>
+              </a:lnSpc>
+              <a:spcAft>
+                <a:spcPts val="400"/>
+              </a:spcAft>
+            </a:pPr>
+            <a:r>
+              <a:rPr sz="2000" b="0">
+                <a:solidFill>
+                  <a:srgbClr val="333333"/>
+                </a:solidFill>
+                <a:latin typeface="Consolas"/>
+              </a:rPr>
+              <a:t>print(household_incomes.isnull().sum())</a:t>
+            </a:r>
+          </a:p>
+          <a:p>
+            <a:pPr>
+              <a:lnSpc>
+                <a:spcPts val="2200"/>
+              </a:lnSpc>
+              <a:spcAft>
+                <a:spcPts val="400"/>
+              </a:spcAft>
+            </a:pPr>
+            <a:r>
+              <a:rPr sz="2000" b="0">
+                <a:solidFill>
+                  <a:srgbClr val="333333"/>
+                </a:solidFill>
+                <a:latin typeface="Consolas"/>
+              </a:rPr>
+              <a:t/>
+            </a:r>
+          </a:p>
+          <a:p>
+            <a:pPr>
+              <a:lnSpc>
+                <a:spcPts val="2200"/>
+              </a:lnSpc>
+              <a:spcAft>
+                <a:spcPts val="400"/>
+              </a:spcAft>
+            </a:pPr>
+            <a:r>
+              <a:rPr sz="2000" b="0">
+                <a:solidFill>
+                  <a:srgbClr val="333333"/>
+                </a:solidFill>
+                <a:latin typeface="Consolas"/>
+              </a:rPr>
+              <a:t># Visualize the income distribution</a:t>
+            </a:r>
+          </a:p>
+          <a:p>
+            <a:pPr>
+              <a:lnSpc>
+                <a:spcPts val="2200"/>
+              </a:lnSpc>
+              <a:spcAft>
+                <a:spcPts val="400"/>
+              </a:spcAft>
+            </a:pPr>
+            <a:r>
+              <a:rPr sz="2000" b="0">
+                <a:solidFill>
+                  <a:srgbClr val="333333"/>
+                </a:solidFill>
+                <a:latin typeface="Consolas"/>
+              </a:rPr>
+              <a:t># ...</a:t>
+            </a:r>
+          </a:p>
+        </p:txBody>
+      </p:sp>
+      <p:sp>
+        <p:nvSpPr>
+          <p:cNvPr id="4" name="TextBox 3"/>
+          <p:cNvSpPr txBox="1"/>
+          <p:nvPr/>
+        </p:nvSpPr>
+        <p:spPr>
+          <a:xfrm>
+            <a:off x="548640" y="6355080"/>
+            <a:ext cx="11064240" cy="320040"/>
+          </a:xfrm>
+          <a:prstGeom prst="rect">
+            <a:avLst/>
+          </a:prstGeom>
+          <a:noFill/>
+        </p:spPr>
+        <p:txBody>
+          <a:bodyPr wrap="square">
+            <a:noAutofit/>
+          </a:bodyPr>
+          <a:lstStyle/>
+          <a:p>
+            <a:pPr algn="r">
+              <a:lnSpc>
+                <a:spcPts val="2200"/>
+              </a:lnSpc>
+              <a:defRPr sz="1000" b="0">
+                <a:solidFill>
+                  <a:srgbClr val="666666"/>
+                </a:solidFill>
+                <a:latin typeface="Calibri"/>
+              </a:defRPr>
+            </a:pPr>
+            <a:r>
+              <a:t>Chapter 1 — 05 Exploring A Dataset</a:t>
+            </a:r>
+          </a:p>
+        </p:txBody>
+      </p:sp>
+    </p:spTree>
+  </p:cSld>
+  <p:clrMapOvr>
+    <a:masterClrMapping/>
+  </p:clrMapOvr>
+</p:sld>
+</file>
+
+<file path=ppt/slides/slide8.xml><?xml version="1.0" encoding="utf-8"?>
+<p:sld xmlns:a="http://schemas.openxmlformats.org/drawingml/2006/main" xmlns:p="http://schemas.openxmlformats.org/presentationml/2006/main" xmlns:r="http://schemas.openxmlformats.org/officeDocument/2006/relationships">
+  <p:cSld>
+    <p:spTree>
+      <p:nvGrpSpPr>
+        <p:cNvPr id="1" name=""/>
+        <p:cNvGrpSpPr/>
+        <p:nvPr/>
+      </p:nvGrpSpPr>
+      <p:grpSpPr/>
+      <p:sp>
+        <p:nvSpPr>
+          <p:cNvPr id="2" name="TextBox 1"/>
+          <p:cNvSpPr txBox="1"/>
+          <p:nvPr/>
+        </p:nvSpPr>
+        <p:spPr>
+          <a:xfrm>
+            <a:off x="548640" y="411480"/>
+            <a:ext cx="11064240" cy="777240"/>
+          </a:xfrm>
+          <a:prstGeom prst="rect">
+            <a:avLst/>
+          </a:prstGeom>
+          <a:noFill/>
+        </p:spPr>
+        <p:txBody>
+          <a:bodyPr wrap="square">
+            <a:noAutofit/>
+          </a:bodyPr>
+          <a:lstStyle/>
+          <a:p>
+            <a:pPr>
+              <a:lnSpc>
+                <a:spcPts val="2200"/>
+              </a:lnSpc>
+            </a:pPr>
+            <a:r>
+              <a:rPr sz="2800" b="1">
+                <a:solidFill>
+                  <a:srgbClr val="1A1A2E"/>
+                </a:solidFill>
+                <a:latin typeface="Calibri"/>
+              </a:rPr>
               <a:t>Takeaways</a:t>
             </a:r>
           </a:p>
@@ -4643,50 +5525,53 @@
           <a:lstStyle/>
           <a:p>
             <a:pPr>
+              <a:spcAft>
+                <a:spcPts val="1000"/>
+              </a:spcAft>
+              <a:buChar char="•"/>
               <a:lnSpc>
                 <a:spcPts val="2200"/>
               </a:lnSpc>
+            </a:pPr>
+            <a:r>
+              <a:rPr sz="2000" b="0">
+                <a:solidFill>
+                  <a:srgbClr val="333333"/>
+                </a:solidFill>
+                <a:latin typeface="Calibri"/>
+              </a:rPr>
+              <a:t>Explore before modeling</a:t>
+            </a:r>
+          </a:p>
+          <a:p>
+            <a:pPr>
               <a:spcAft>
                 <a:spcPts val="1000"/>
               </a:spcAft>
-            </a:pPr>
-            <a:r>
-              <a:rPr sz="2000" b="0">
-                <a:solidFill>
-                  <a:srgbClr val="333333"/>
-                </a:solidFill>
-                <a:latin typeface="Calibri"/>
-              </a:rPr>
-              <a:t>• Explore before modeling to set expectations</a:t>
-            </a:r>
-          </a:p>
-          <a:p>
-            <a:pPr>
+              <a:buChar char="•"/>
               <a:lnSpc>
                 <a:spcPts val="2200"/>
               </a:lnSpc>
+            </a:pPr>
+            <a:r>
+              <a:rPr sz="2000" b="0">
+                <a:solidFill>
+                  <a:srgbClr val="333333"/>
+                </a:solidFill>
+                <a:latin typeface="Calibri"/>
+              </a:rPr>
+              <a:t>Choose tools that fit size and structure</a:t>
+            </a:r>
+          </a:p>
+          <a:p>
+            <a:pPr>
               <a:spcAft>
                 <a:spcPts val="1000"/>
               </a:spcAft>
-            </a:pPr>
-            <a:r>
-              <a:rPr sz="2000" b="0">
-                <a:solidFill>
-                  <a:srgbClr val="333333"/>
-                </a:solidFill>
-                <a:latin typeface="Calibri"/>
-              </a:rPr>
-              <a:t>• Tool choice follows size, structure, and audience</a:t>
-            </a:r>
-          </a:p>
-          <a:p>
-            <a:pPr>
+              <a:buChar char="•"/>
               <a:lnSpc>
                 <a:spcPts val="2200"/>
               </a:lnSpc>
-              <a:spcAft>
-                <a:spcPts val="1000"/>
-              </a:spcAft>
             </a:pPr>
             <a:r>
               <a:rPr sz="2000" b="0">
@@ -4695,7 +5580,7 @@
                 </a:solidFill>
                 <a:latin typeface="Calibri"/>
               </a:rPr>
-              <a:t>• Document what you inspected and what you will fix</a:t>
+              <a:t>Document what you inspected and what you decided to fix so later analysis stays</a:t>
             </a:r>
           </a:p>
         </p:txBody>
@@ -4734,7 +5619,166 @@
               </a:defRPr>
             </a:pPr>
             <a:r>
-              <a:t>Chapter 1 — Exploring A Dataset</a:t>
+              <a:t>Chapter 1 — 05 Exploring A Dataset</a:t>
+            </a:r>
+          </a:p>
+        </p:txBody>
+      </p:sp>
+    </p:spTree>
+  </p:cSld>
+  <p:clrMapOvr>
+    <a:masterClrMapping/>
+  </p:clrMapOvr>
+</p:sld>
+</file>
+
+<file path=ppt/slides/slide9.xml><?xml version="1.0" encoding="utf-8"?>
+<p:sld xmlns:a="http://schemas.openxmlformats.org/drawingml/2006/main" xmlns:p="http://schemas.openxmlformats.org/presentationml/2006/main" xmlns:r="http://schemas.openxmlformats.org/officeDocument/2006/relationships">
+  <p:cSld>
+    <p:spTree>
+      <p:nvGrpSpPr>
+        <p:cNvPr id="1" name=""/>
+        <p:cNvGrpSpPr/>
+        <p:nvPr/>
+      </p:nvGrpSpPr>
+      <p:grpSpPr/>
+      <p:sp>
+        <p:nvSpPr>
+          <p:cNvPr id="2" name="TextBox 1"/>
+          <p:cNvSpPr txBox="1"/>
+          <p:nvPr/>
+        </p:nvSpPr>
+        <p:spPr>
+          <a:xfrm>
+            <a:off x="548640" y="411480"/>
+            <a:ext cx="11064240" cy="777240"/>
+          </a:xfrm>
+          <a:prstGeom prst="rect">
+            <a:avLst/>
+          </a:prstGeom>
+          <a:noFill/>
+        </p:spPr>
+        <p:txBody>
+          <a:bodyPr wrap="square">
+            <a:noAutofit/>
+          </a:bodyPr>
+          <a:lstStyle/>
+          <a:p>
+            <a:pPr>
+              <a:lnSpc>
+                <a:spcPts val="2200"/>
+              </a:lnSpc>
+            </a:pPr>
+            <a:r>
+              <a:rPr sz="2800" b="1">
+                <a:solidFill>
+                  <a:srgbClr val="1A1A2E"/>
+                </a:solidFill>
+                <a:latin typeface="Calibri"/>
+              </a:rPr>
+              <a:t>Next</a:t>
+            </a:r>
+          </a:p>
+        </p:txBody>
+      </p:sp>
+      <p:sp>
+        <p:nvSpPr>
+          <p:cNvPr id="3" name="TextBox 2"/>
+          <p:cNvSpPr txBox="1"/>
+          <p:nvPr/>
+        </p:nvSpPr>
+        <p:spPr>
+          <a:xfrm>
+            <a:off x="548640" y="1234440"/>
+            <a:ext cx="11064240" cy="4937760"/>
+          </a:xfrm>
+          <a:prstGeom prst="rect">
+            <a:avLst/>
+          </a:prstGeom>
+          <a:noFill/>
+        </p:spPr>
+        <p:txBody>
+          <a:bodyPr wrap="square">
+            <a:noAutofit/>
+          </a:bodyPr>
+          <a:lstStyle/>
+          <a:p>
+            <a:pPr>
+              <a:spcAft>
+                <a:spcPts val="1000"/>
+              </a:spcAft>
+              <a:buChar char="•"/>
+              <a:lnSpc>
+                <a:spcPts val="2200"/>
+              </a:lnSpc>
+            </a:pPr>
+            <a:r>
+              <a:rPr sz="2000" b="0">
+                <a:solidFill>
+                  <a:srgbClr val="333333"/>
+                </a:solidFill>
+                <a:latin typeface="Calibri"/>
+              </a:rPr>
+              <a:t>Complete the quiz for this clip</a:t>
+            </a:r>
+          </a:p>
+          <a:p>
+            <a:pPr>
+              <a:spcAft>
+                <a:spcPts val="1000"/>
+              </a:spcAft>
+              <a:buChar char="•"/>
+              <a:lnSpc>
+                <a:spcPts val="2200"/>
+              </a:lnSpc>
+            </a:pPr>
+            <a:r>
+              <a:rPr sz="2000" b="0">
+                <a:solidFill>
+                  <a:srgbClr val="333333"/>
+                </a:solidFill>
+                <a:latin typeface="Calibri"/>
+              </a:rPr>
+              <a:t>Complete the quiz</a:t>
+            </a:r>
+          </a:p>
+        </p:txBody>
+      </p:sp>
+      <p:sp>
+        <p:nvSpPr>
+          <p:cNvPr id="4" name="TextBox 3"/>
+          <p:cNvSpPr txBox="1"/>
+          <p:nvPr/>
+        </p:nvSpPr>
+        <p:spPr>
+          <a:xfrm>
+            <a:off x="548640" y="6355080"/>
+            <a:ext cx="11064240" cy="320040"/>
+          </a:xfrm>
+          <a:prstGeom prst="rect">
+            <a:avLst/>
+          </a:prstGeom>
+          <a:noFill/>
+        </p:spPr>
+        <p:txBody>
+          <a:bodyPr wrap="square">
+            <a:noAutofit/>
+          </a:bodyPr>
+          <a:lstStyle/>
+          <a:p>
+            <a:pPr algn="r">
+              <a:lnSpc>
+                <a:spcPts val="2200"/>
+              </a:lnSpc>
+              <a:defRPr sz="1000" b="0">
+                <a:solidFill>
+                  <a:srgbClr val="666666"/>
+                </a:solidFill>
+                <a:latin typeface="Calibri"/>
+              </a:defRPr>
+            </a:pPr>
+            <a:r>
+              <a:t>Chapter 1 — 05 Exploring A Dataset</a:t>
             </a:r>
           </a:p>
         </p:txBody>
